--- a/lecons/F5/15_F5_M1_L13_Pipelines.pptx
+++ b/lecons/F5/15_F5_M1_L13_Pipelines.pptx
@@ -3105,7 +3105,7 @@
           <a:p>
             <a:r>
               <a:rPr lang="en-US" dirty="0"/>
-              <a:t>Let us copy Advantages and Disadvantages. Pipelines have the following advantages and disadvantages. On this slide we have Advantages and Disadvantages. Write each point on a new line, with the key term first, and explain it in your own words when we revise. When you finish, we go to the next slide.</a:t>
+              <a:t>Let us copy Advantages and Disadvantages. Pipelines have the following advantages, disadvantages and risks. On this slide we have Advantages and Disadvantages. Write each point on a new line, with the key term first, and explain it in your own words when we revise. When you finish, we go to the next slide.</a:t>
             </a:r>
             <a:endParaRPr lang="en-US" dirty="0"/>
           </a:p>
@@ -13855,7 +13855,7 @@
                 <a:ea typeface="Times New Roman" pitchFamily="34" charset="-122"/>
                 <a:cs typeface="Times New Roman" pitchFamily="34" charset="-120"/>
               </a:rPr>
-              <a:t>Pipelines have the following advantages and disadvantages:</a:t>
+              <a:t>Pipelines have the following advantages, disadvantages and risks:</a:t>
             </a:r>
             <a:endParaRPr lang="en-US" sz="4000" dirty="0"/>
           </a:p>

--- a/lecons/F5/15_F5_M1_L13_Pipelines.pptx
+++ b/lecons/F5/15_F5_M1_L13_Pipelines.pptx
@@ -57,9 +57,11 @@
     <p:sldId id="305" r:id="rId51"/>
     <p:sldId id="306" r:id="rId52"/>
     <p:sldId id="307" r:id="rId53"/>
+    <p:sldId id="308" r:id="rId54"/>
+    <p:sldId id="309" r:id="rId55"/>
   </p:sldIdLst>
   <p:notesMasterIdLst>
-    <p:notesMasterId r:id="rId54"/>
+    <p:notesMasterId r:id="rId56"/>
   </p:notesMasterIdLst>
   <p:sldSz cx="12192000" cy="6858000"/>
   <p:notesSz cx="6858000" cy="12192000"/>
@@ -3105,7 +3107,7 @@
           <a:p>
             <a:r>
               <a:rPr lang="en-US" dirty="0"/>
-              <a:t>Let us copy Advantages and Disadvantages. Pipelines have the following advantages, disadvantages and risks. On this slide we have Advantages and Disadvantages. Write each point on a new line, with the key term first, and explain it in your own words when we revise. When you finish, we go to the next slide.</a:t>
+              <a:t>Let us copy Advantages. Pipelines have the following advantages. On this slide we have Large volumes and Low cost. Write each point on a new line, with the key term first, and explain it in your own words when we revise. When you finish, we go to the next slide.</a:t>
             </a:r>
             <a:endParaRPr lang="en-US" dirty="0"/>
           </a:p>
@@ -3193,7 +3195,7 @@
           <a:p>
             <a:r>
               <a:rPr lang="en-US" dirty="0"/>
-              <a:t>We continue with Advantages and Disadvantages. On this slide we have Risks. Write each point on a new line, with the key term first, and explain it in your own words when we revise.</a:t>
+              <a:t>We continue with Advantages. On this slide we have Continuous and safe flow. Write each point on a new line, with the key term first, and explain it in your own words when we revise.</a:t>
             </a:r>
             <a:endParaRPr lang="en-US" dirty="0"/>
           </a:p>
@@ -3281,7 +3283,7 @@
           <a:p>
             <a:r>
               <a:rPr lang="en-US" dirty="0"/>
-              <a:t>Let us copy Impact on the Economy and the Environment. Pipelines have the following impacts. On this slide we have Economy and Example. Write each point on a new line, with the key term first, and explain it in your own words when we revise. When you finish, we go to the next slide.</a:t>
+              <a:t>Let us copy Disadvantages and Risks. Pipelines have the following disadvantages and risks. On this slide we have High building cost and Liquids and gases only. Write each point on a new line, with the key term first, and explain it in your own words when we revise. When you finish, we go to the next slide.</a:t>
             </a:r>
             <a:endParaRPr lang="en-US" dirty="0"/>
           </a:p>
@@ -3369,7 +3371,7 @@
           <a:p>
             <a:r>
               <a:rPr lang="en-US" dirty="0"/>
-              <a:t>We continue with Impact on the Economy and the Environment. On this slide we have Environment. Write each point on a new line, with the key term first, and explain it in your own words when we revise.</a:t>
+              <a:t>We continue with Disadvantages and Risks. On this slide we have Leaks, theft and sabotage. Write each point on a new line, with the key term first, and explain it in your own words when we revise.</a:t>
             </a:r>
             <a:endParaRPr lang="en-US" dirty="0"/>
           </a:p>
@@ -3545,7 +3547,7 @@
           <a:p>
             <a:r>
               <a:rPr lang="en-US" dirty="0"/>
-              <a:t>Now draw this illustration in your notebook: environmental pollution. Give it a title and label it clearly.</a:t>
+              <a:t>Let us copy Impact on the Economy and the Environment. Pipelines have the following impacts. On this slide we have Economy and Example. Write each point on a new line, with the key term first, and explain it in your own words when we revise. When you finish, we go to the next slide.</a:t>
             </a:r>
             <a:endParaRPr lang="en-US" dirty="0"/>
           </a:p>
@@ -3633,7 +3635,7 @@
           <a:p>
             <a:r>
               <a:rPr lang="en-US" dirty="0"/>
-              <a:t>Now let us check what you have understood. Question 1: What is a pipeline? Answer in your exercise book.</a:t>
+              <a:t>We continue with Impact on the Economy and the Environment. On this slide we have Environment. Write each point on a new line, with the key term first, and explain it in your own words when we revise.</a:t>
             </a:r>
             <a:endParaRPr lang="en-US" dirty="0"/>
           </a:p>
@@ -3721,7 +3723,7 @@
           <a:p>
             <a:r>
               <a:rPr lang="en-US" dirty="0"/>
-              <a:t>The expected answer is: a line of pipes carrying liquids or gases. If you got it right, well done.</a:t>
+              <a:t>Now draw this illustration in your notebook: environmental pollution. Give it a title and label it clearly.</a:t>
             </a:r>
             <a:endParaRPr lang="en-US" dirty="0"/>
           </a:p>
@@ -3809,7 +3811,7 @@
           <a:p>
             <a:r>
               <a:rPr lang="en-US" dirty="0"/>
-              <a:t>Now let us check what you have understood. Question 2: Give one economic and one environmental impact. Answer in your exercise book.</a:t>
+              <a:t>Now let us check what you have understood. Question 1: What is a pipeline? Answer in your exercise book.</a:t>
             </a:r>
             <a:endParaRPr lang="en-US" dirty="0"/>
           </a:p>
@@ -3897,7 +3899,7 @@
           <a:p>
             <a:r>
               <a:rPr lang="en-US" dirty="0"/>
-              <a:t>The expected answer is: revenue; oil pollution. If you got it right, well done.</a:t>
+              <a:t>The expected answer is: a line of pipes carrying liquids or gases. If you got it right, well done.</a:t>
             </a:r>
             <a:endParaRPr lang="en-US" dirty="0"/>
           </a:p>
@@ -3985,7 +3987,7 @@
           <a:p>
             <a:r>
               <a:rPr lang="en-US" dirty="0"/>
-              <a:t>For those who need more practice, fill in the blanks in your exercise book. The answers are: number 1, gases; number 2, Kribi; number 3, pollution.</a:t>
+              <a:t>Now let us check what you have understood. Question 2: Give one economic and one environmental impact. Answer in your exercise book.</a:t>
             </a:r>
             <a:endParaRPr lang="en-US" dirty="0"/>
           </a:p>
@@ -4073,7 +4075,7 @@
           <a:p>
             <a:r>
               <a:rPr lang="en-US" dirty="0"/>
-              <a:t>For your homework: Draw a sketch map of the Chad–Cameroon pipeline. We shall correct it at the beginning of our next lesson.</a:t>
+              <a:t>The expected answer is: revenue; oil pollution. If you got it right, well done.</a:t>
             </a:r>
             <a:endParaRPr lang="en-US" dirty="0"/>
           </a:p>
@@ -4161,7 +4163,7 @@
           <a:p>
             <a:r>
               <a:rPr lang="en-US" dirty="0"/>
-              <a:t>Our next lesson will be on Lesson 14: Globalisation. Thank you for your attention, and see you next time.</a:t>
+              <a:t>For those who need more practice, fill in the blanks in your exercise book. The answers are: number 1, gases; number 2, Kribi; number 3, pollution.</a:t>
             </a:r>
             <a:endParaRPr lang="en-US" dirty="0"/>
           </a:p>
@@ -4249,7 +4251,7 @@
           <a:p>
             <a:r>
               <a:rPr lang="en-US" dirty="0"/>
-              <a:t>Let us play the bilingual game. I say a word in English, and you give me the French word. Then we do the reverse.</a:t>
+              <a:t>For your homework: Draw a sketch map of the Chad–Cameroon pipeline. We shall correct it at the beginning of our next lesson.</a:t>
             </a:r>
             <a:endParaRPr lang="en-US" dirty="0"/>
           </a:p>
@@ -4337,7 +4339,7 @@
           <a:p>
             <a:r>
               <a:rPr lang="en-US" dirty="0"/>
-              <a:t>I record this information in the official logbook of the class after the lesson.</a:t>
+              <a:t>Our next lesson will be on Lesson 14: Globalisation. Thank you for your attention, and see you next time.</a:t>
             </a:r>
             <a:endParaRPr lang="en-US" dirty="0"/>
           </a:p>
@@ -4513,7 +4515,7 @@
           <a:p>
             <a:r>
               <a:rPr lang="en-US" dirty="0"/>
-              <a:t>I complete the second page of the logbook: the matter taught, the evaluation, the homework and the attendance.</a:t>
+              <a:t>Let us play the bilingual game. I say a word in English, and you give me the French word. Then we do the reverse.</a:t>
             </a:r>
             <a:endParaRPr lang="en-US" dirty="0"/>
           </a:p>
@@ -4601,7 +4603,7 @@
           <a:p>
             <a:r>
               <a:rPr lang="en-US" dirty="0"/>
-              <a:t>This slide is for me, the teacher: it gives the timing of the lesson and what to do if the projector is not available.</a:t>
+              <a:t>I record this information in the official logbook of the class after the lesson.</a:t>
             </a:r>
             <a:endParaRPr lang="en-US" dirty="0"/>
           </a:p>
@@ -4689,7 +4691,7 @@
           <a:p>
             <a:r>
               <a:rPr lang="en-US" dirty="0"/>
-              <a:t>These are the references and picture credits used to prepare this lesson.</a:t>
+              <a:t>I complete the second page of the logbook: the matter taught, the evaluation, the homework and the attendance.</a:t>
             </a:r>
             <a:endParaRPr lang="en-US" dirty="0"/>
           </a:p>
@@ -4713,6 +4715,182 @@
             <a:fld id="{F7021451-1387-4CA6-816F-3879F97B5CBC}" type="slidenum">
               <a:rPr lang="en-US"/>
               <a:t>52</a:t>
+            </a:fld>
+            <a:endParaRPr lang="en-US"/>
+          </a:p>
+        </p:txBody>
+      </p:sp>
+    </p:spTree>
+    <p:extLst>
+      <p:ext uri="{BB962C8B-B14F-4D97-AF65-F5344CB8AC3E}">
+        <p14:creationId xmlns:p14="http://schemas.microsoft.com/office/powerpoint/2010/main" val="1024086991"/>
+      </p:ext>
+    </p:extLst>
+  </p:cSld>
+  <p:clrMapOvr>
+    <a:masterClrMapping/>
+  </p:clrMapOvr>
+</p:notes>
+</file>
+
+<file path=ppt/notesSlides/notesSlide53.xml><?xml version="1.0" encoding="utf-8"?>
+<p:notes xmlns:a="http://schemas.openxmlformats.org/drawingml/2006/main" xmlns:r="http://schemas.openxmlformats.org/officeDocument/2006/relationships" xmlns:p="http://schemas.openxmlformats.org/presentationml/2006/main">
+  <p:cSld>
+    <p:spTree>
+      <p:nvGrpSpPr>
+        <p:cNvPr id="1" name=""/>
+        <p:cNvGrpSpPr/>
+        <p:nvPr/>
+      </p:nvGrpSpPr>
+      <p:grpSpPr>
+        <a:xfrm>
+          <a:off x="0" y="0"/>
+          <a:ext cx="0" cy="0"/>
+          <a:chOff x="0" y="0"/>
+          <a:chExt cx="0" cy="0"/>
+        </a:xfrm>
+      </p:grpSpPr>
+      <p:sp>
+        <p:nvSpPr>
+          <p:cNvPr id="2" name="Slide Image Placeholder 1"/>
+          <p:cNvSpPr>
+            <a:spLocks noGrp="1" noRot="1" noChangeAspect="1"/>
+          </p:cNvSpPr>
+          <p:nvPr>
+            <p:ph type="sldImg"/>
+          </p:nvPr>
+        </p:nvSpPr>
+        <p:spPr/>
+      </p:sp>
+      <p:sp>
+        <p:nvSpPr>
+          <p:cNvPr id="3" name="Notes Placeholder 2"/>
+          <p:cNvSpPr>
+            <a:spLocks noGrp="1"/>
+          </p:cNvSpPr>
+          <p:nvPr>
+            <p:ph type="body" idx="1"/>
+          </p:nvPr>
+        </p:nvSpPr>
+        <p:spPr/>
+        <p:txBody>
+          <a:bodyPr/>
+          <a:lstStyle/>
+          <a:p>
+            <a:r>
+              <a:rPr lang="en-US" dirty="0"/>
+              <a:t>This slide is for me, the teacher: it gives the timing of the lesson and what to do if the projector is not available.</a:t>
+            </a:r>
+            <a:endParaRPr lang="en-US" dirty="0"/>
+          </a:p>
+        </p:txBody>
+      </p:sp>
+      <p:sp>
+        <p:nvSpPr>
+          <p:cNvPr id="4" name="Slide Number Placeholder 3"/>
+          <p:cNvSpPr>
+            <a:spLocks noGrp="1"/>
+          </p:cNvSpPr>
+          <p:nvPr>
+            <p:ph type="sldNum" sz="quarter" idx="10"/>
+          </p:nvPr>
+        </p:nvSpPr>
+        <p:spPr/>
+        <p:txBody>
+          <a:bodyPr/>
+          <a:lstStyle/>
+          <a:p>
+            <a:fld id="{F7021451-1387-4CA6-816F-3879F97B5CBC}" type="slidenum">
+              <a:rPr lang="en-US"/>
+              <a:t>53</a:t>
+            </a:fld>
+            <a:endParaRPr lang="en-US"/>
+          </a:p>
+        </p:txBody>
+      </p:sp>
+    </p:spTree>
+    <p:extLst>
+      <p:ext uri="{BB962C8B-B14F-4D97-AF65-F5344CB8AC3E}">
+        <p14:creationId xmlns:p14="http://schemas.microsoft.com/office/powerpoint/2010/main" val="1024086991"/>
+      </p:ext>
+    </p:extLst>
+  </p:cSld>
+  <p:clrMapOvr>
+    <a:masterClrMapping/>
+  </p:clrMapOvr>
+</p:notes>
+</file>
+
+<file path=ppt/notesSlides/notesSlide54.xml><?xml version="1.0" encoding="utf-8"?>
+<p:notes xmlns:a="http://schemas.openxmlformats.org/drawingml/2006/main" xmlns:r="http://schemas.openxmlformats.org/officeDocument/2006/relationships" xmlns:p="http://schemas.openxmlformats.org/presentationml/2006/main">
+  <p:cSld>
+    <p:spTree>
+      <p:nvGrpSpPr>
+        <p:cNvPr id="1" name=""/>
+        <p:cNvGrpSpPr/>
+        <p:nvPr/>
+      </p:nvGrpSpPr>
+      <p:grpSpPr>
+        <a:xfrm>
+          <a:off x="0" y="0"/>
+          <a:ext cx="0" cy="0"/>
+          <a:chOff x="0" y="0"/>
+          <a:chExt cx="0" cy="0"/>
+        </a:xfrm>
+      </p:grpSpPr>
+      <p:sp>
+        <p:nvSpPr>
+          <p:cNvPr id="2" name="Slide Image Placeholder 1"/>
+          <p:cNvSpPr>
+            <a:spLocks noGrp="1" noRot="1" noChangeAspect="1"/>
+          </p:cNvSpPr>
+          <p:nvPr>
+            <p:ph type="sldImg"/>
+          </p:nvPr>
+        </p:nvSpPr>
+        <p:spPr/>
+      </p:sp>
+      <p:sp>
+        <p:nvSpPr>
+          <p:cNvPr id="3" name="Notes Placeholder 2"/>
+          <p:cNvSpPr>
+            <a:spLocks noGrp="1"/>
+          </p:cNvSpPr>
+          <p:nvPr>
+            <p:ph type="body" idx="1"/>
+          </p:nvPr>
+        </p:nvSpPr>
+        <p:spPr/>
+        <p:txBody>
+          <a:bodyPr/>
+          <a:lstStyle/>
+          <a:p>
+            <a:r>
+              <a:rPr lang="en-US" dirty="0"/>
+              <a:t>These are the references and picture credits used to prepare this lesson.</a:t>
+            </a:r>
+            <a:endParaRPr lang="en-US" dirty="0"/>
+          </a:p>
+        </p:txBody>
+      </p:sp>
+      <p:sp>
+        <p:nvSpPr>
+          <p:cNvPr id="4" name="Slide Number Placeholder 3"/>
+          <p:cNvSpPr>
+            <a:spLocks noGrp="1"/>
+          </p:cNvSpPr>
+          <p:nvPr>
+            <p:ph type="sldNum" sz="quarter" idx="10"/>
+          </p:nvPr>
+        </p:nvSpPr>
+        <p:spPr/>
+        <p:txBody>
+          <a:bodyPr/>
+          <a:lstStyle/>
+          <a:p>
+            <a:fld id="{F7021451-1387-4CA6-816F-3879F97B5CBC}" type="slidenum">
+              <a:rPr lang="en-US"/>
+              <a:t>54</a:t>
             </a:fld>
             <a:endParaRPr lang="en-US"/>
           </a:p>
@@ -13771,7 +13949,7 @@
         <p:spPr>
           <a:xfrm>
             <a:off x="0" y="658368"/>
-            <a:ext cx="2468880" cy="5833872"/>
+            <a:ext cx="5120640" cy="5833872"/>
           </a:xfrm>
           <a:prstGeom prst="rect">
             <a:avLst/>
@@ -13786,8 +13964,8 @@
         </p:nvSpPr>
         <p:spPr>
           <a:xfrm>
-            <a:off x="2697480" y="1005840"/>
-            <a:ext cx="9174175" cy="731520"/>
+            <a:off x="5349240" y="1005840"/>
+            <a:ext cx="6522415" cy="731520"/>
           </a:xfrm>
           <a:prstGeom prst="rect">
             <a:avLst/>
@@ -13827,8 +14005,47 @@
         </p:nvSpPr>
         <p:spPr>
           <a:xfrm>
-            <a:off x="2697480" y="1783080"/>
-            <a:ext cx="9174175" cy="4663440"/>
+            <a:off x="5349240" y="1737360"/>
+            <a:ext cx="6522415" cy="457200"/>
+          </a:xfrm>
+          <a:prstGeom prst="rect">
+            <a:avLst/>
+          </a:prstGeom>
+          <a:noFill/>
+          <a:ln/>
+        </p:spPr>
+        <p:txBody>
+          <a:bodyPr wrap="square" lIns="0" tIns="0" rIns="0" bIns="0" rtlCol="0" anchor="ctr"/>
+          <a:lstStyle/>
+          <a:p>
+            <a:pPr algn="l" indent="0" marL="0">
+              <a:buNone/>
+            </a:pPr>
+            <a:r>
+              <a:rPr lang="en-US" sz="3200" b="1" dirty="0">
+                <a:solidFill>
+                  <a:srgbClr val="990011"/>
+                </a:solidFill>
+                <a:latin typeface="Times New Roman" pitchFamily="34" charset="0"/>
+                <a:ea typeface="Times New Roman" pitchFamily="34" charset="-122"/>
+                <a:cs typeface="Times New Roman" pitchFamily="34" charset="-120"/>
+              </a:rPr>
+              <a:t>A) Advantages</a:t>
+            </a:r>
+            <a:endParaRPr lang="en-US" sz="3200" dirty="0"/>
+          </a:p>
+        </p:txBody>
+      </p:sp>
+      <p:sp>
+        <p:nvSpPr>
+          <p:cNvPr id="6" name="Text 3"/>
+          <p:cNvSpPr/>
+          <p:nvPr/>
+        </p:nvSpPr>
+        <p:spPr>
+          <a:xfrm>
+            <a:off x="5349240" y="2240280"/>
+            <a:ext cx="6522415" cy="4206240"/>
           </a:xfrm>
           <a:prstGeom prst="rect">
             <a:avLst/>
@@ -13855,7 +14072,7 @@
                 <a:ea typeface="Times New Roman" pitchFamily="34" charset="-122"/>
                 <a:cs typeface="Times New Roman" pitchFamily="34" charset="-120"/>
               </a:rPr>
-              <a:t>Pipelines have the following advantages, disadvantages and risks:</a:t>
+              <a:t>Pipelines have the following advantages:</a:t>
             </a:r>
             <a:endParaRPr lang="en-US" sz="4000" dirty="0"/>
           </a:p>
@@ -13875,7 +14092,7 @@
                 <a:ea typeface="Times New Roman" pitchFamily="34" charset="-122"/>
                 <a:cs typeface="Times New Roman" pitchFamily="34" charset="-120"/>
               </a:rPr>
-              <a:t>Advantages: </a:t>
+              <a:t>Large volumes: </a:t>
             </a:r>
             <a:pPr algn="l" indent="0" marL="0">
               <a:spcAft>
@@ -13892,7 +14109,7 @@
                 <a:ea typeface="Times New Roman" pitchFamily="34" charset="-122"/>
                 <a:cs typeface="Times New Roman" pitchFamily="34" charset="-120"/>
               </a:rPr>
-              <a:t>They carry large volumes cheaply, continuously and safely.</a:t>
+              <a:t>They carry a lot of oil, gas or water.</a:t>
             </a:r>
             <a:endParaRPr lang="en-US" sz="4000" dirty="0"/>
           </a:p>
@@ -13912,7 +14129,7 @@
                 <a:ea typeface="Times New Roman" pitchFamily="34" charset="-122"/>
                 <a:cs typeface="Times New Roman" pitchFamily="34" charset="-120"/>
               </a:rPr>
-              <a:t>Disadvantages: </a:t>
+              <a:t>Low cost: </a:t>
             </a:r>
             <a:pPr algn="l" indent="0" marL="0">
               <a:spcAft>
@@ -13929,7 +14146,7 @@
                 <a:ea typeface="Times New Roman" pitchFamily="34" charset="-122"/>
                 <a:cs typeface="Times New Roman" pitchFamily="34" charset="-120"/>
               </a:rPr>
-              <a:t>They are costly to build and carry only liquids and gases.</a:t>
+              <a:t>Transport is cheap once the pipe is built.</a:t>
             </a:r>
             <a:endParaRPr lang="en-US" sz="4000" dirty="0"/>
           </a:p>
@@ -14106,7 +14323,7 @@
                 <a:ea typeface="Times New Roman" pitchFamily="34" charset="-122"/>
                 <a:cs typeface="Times New Roman" pitchFamily="34" charset="-120"/>
               </a:rPr>
-              <a:t>1. Advantages and Disadvantages (continued)</a:t>
+              <a:t>1. Advantages and Disadvantages</a:t>
             </a:r>
             <a:endParaRPr lang="en-US" sz="3600" dirty="0"/>
           </a:p>
@@ -14120,8 +14337,47 @@
         </p:nvSpPr>
         <p:spPr>
           <a:xfrm>
-            <a:off x="5349240" y="1783080"/>
-            <a:ext cx="6522415" cy="4663440"/>
+            <a:off x="5349240" y="1737360"/>
+            <a:ext cx="6522415" cy="457200"/>
+          </a:xfrm>
+          <a:prstGeom prst="rect">
+            <a:avLst/>
+          </a:prstGeom>
+          <a:noFill/>
+          <a:ln/>
+        </p:spPr>
+        <p:txBody>
+          <a:bodyPr wrap="square" lIns="0" tIns="0" rIns="0" bIns="0" rtlCol="0" anchor="ctr"/>
+          <a:lstStyle/>
+          <a:p>
+            <a:pPr algn="l" indent="0" marL="0">
+              <a:buNone/>
+            </a:pPr>
+            <a:r>
+              <a:rPr lang="en-US" sz="3200" b="1" dirty="0">
+                <a:solidFill>
+                  <a:srgbClr val="990011"/>
+                </a:solidFill>
+                <a:latin typeface="Times New Roman" pitchFamily="34" charset="0"/>
+                <a:ea typeface="Times New Roman" pitchFamily="34" charset="-122"/>
+                <a:cs typeface="Times New Roman" pitchFamily="34" charset="-120"/>
+              </a:rPr>
+              <a:t>A) Advantages (continued)</a:t>
+            </a:r>
+            <a:endParaRPr lang="en-US" sz="3200" dirty="0"/>
+          </a:p>
+        </p:txBody>
+      </p:sp>
+      <p:sp>
+        <p:nvSpPr>
+          <p:cNvPr id="6" name="Text 3"/>
+          <p:cNvSpPr/>
+          <p:nvPr/>
+        </p:nvSpPr>
+        <p:spPr>
+          <a:xfrm>
+            <a:off x="5349240" y="2240280"/>
+            <a:ext cx="6522415" cy="4206240"/>
           </a:xfrm>
           <a:prstGeom prst="rect">
             <a:avLst/>
@@ -14148,7 +14404,7 @@
                 <a:ea typeface="Times New Roman" pitchFamily="34" charset="-122"/>
                 <a:cs typeface="Times New Roman" pitchFamily="34" charset="-120"/>
               </a:rPr>
-              <a:t>Risks: </a:t>
+              <a:t>Continuous and safe flow: </a:t>
             </a:r>
             <a:pPr algn="l" indent="0" marL="0">
               <a:spcAft>
@@ -14165,7 +14421,7 @@
                 <a:ea typeface="Times New Roman" pitchFamily="34" charset="-122"/>
                 <a:cs typeface="Times New Roman" pitchFamily="34" charset="-120"/>
               </a:rPr>
-              <a:t>Leaks, theft and sabotage are possible.</a:t>
+              <a:t>They work day and night with few accidents.</a:t>
             </a:r>
             <a:endParaRPr lang="en-US" sz="4000" dirty="0"/>
           </a:p>
@@ -14300,7 +14556,7 @@
         <p:spPr>
           <a:xfrm>
             <a:off x="0" y="658368"/>
-            <a:ext cx="2468880" cy="5833872"/>
+            <a:ext cx="5120640" cy="5833872"/>
           </a:xfrm>
           <a:prstGeom prst="rect">
             <a:avLst/>
@@ -14315,8 +14571,8 @@
         </p:nvSpPr>
         <p:spPr>
           <a:xfrm>
-            <a:off x="2697480" y="1005840"/>
-            <a:ext cx="9174175" cy="731520"/>
+            <a:off x="5349240" y="1005840"/>
+            <a:ext cx="6522415" cy="731520"/>
           </a:xfrm>
           <a:prstGeom prst="rect">
             <a:avLst/>
@@ -14342,7 +14598,7 @@
                 <a:ea typeface="Times New Roman" pitchFamily="34" charset="-122"/>
                 <a:cs typeface="Times New Roman" pitchFamily="34" charset="-120"/>
               </a:rPr>
-              <a:t>2. Impact on the Economy and the Environment</a:t>
+              <a:t>1. Advantages and Disadvantages</a:t>
             </a:r>
             <a:endParaRPr lang="en-US" sz="3600" dirty="0"/>
           </a:p>
@@ -14356,8 +14612,47 @@
         </p:nvSpPr>
         <p:spPr>
           <a:xfrm>
-            <a:off x="2697480" y="1783080"/>
-            <a:ext cx="9174175" cy="4663440"/>
+            <a:off x="5349240" y="1737360"/>
+            <a:ext cx="6522415" cy="457200"/>
+          </a:xfrm>
+          <a:prstGeom prst="rect">
+            <a:avLst/>
+          </a:prstGeom>
+          <a:noFill/>
+          <a:ln/>
+        </p:spPr>
+        <p:txBody>
+          <a:bodyPr wrap="square" lIns="0" tIns="0" rIns="0" bIns="0" rtlCol="0" anchor="ctr"/>
+          <a:lstStyle/>
+          <a:p>
+            <a:pPr algn="l" indent="0" marL="0">
+              <a:buNone/>
+            </a:pPr>
+            <a:r>
+              <a:rPr lang="en-US" sz="3200" b="1" dirty="0">
+                <a:solidFill>
+                  <a:srgbClr val="990011"/>
+                </a:solidFill>
+                <a:latin typeface="Times New Roman" pitchFamily="34" charset="0"/>
+                <a:ea typeface="Times New Roman" pitchFamily="34" charset="-122"/>
+                <a:cs typeface="Times New Roman" pitchFamily="34" charset="-120"/>
+              </a:rPr>
+              <a:t>B) Disadvantages and Risks</a:t>
+            </a:r>
+            <a:endParaRPr lang="en-US" sz="3200" dirty="0"/>
+          </a:p>
+        </p:txBody>
+      </p:sp>
+      <p:sp>
+        <p:nvSpPr>
+          <p:cNvPr id="6" name="Text 3"/>
+          <p:cNvSpPr/>
+          <p:nvPr/>
+        </p:nvSpPr>
+        <p:spPr>
+          <a:xfrm>
+            <a:off x="5349240" y="2240280"/>
+            <a:ext cx="6522415" cy="4206240"/>
           </a:xfrm>
           <a:prstGeom prst="rect">
             <a:avLst/>
@@ -14384,7 +14679,7 @@
                 <a:ea typeface="Times New Roman" pitchFamily="34" charset="-122"/>
                 <a:cs typeface="Times New Roman" pitchFamily="34" charset="-120"/>
               </a:rPr>
-              <a:t>Pipelines have the following impacts:</a:t>
+              <a:t>Pipelines have the following disadvantages and risks:</a:t>
             </a:r>
             <a:endParaRPr lang="en-US" sz="4000" dirty="0"/>
           </a:p>
@@ -14404,7 +14699,7 @@
                 <a:ea typeface="Times New Roman" pitchFamily="34" charset="-122"/>
                 <a:cs typeface="Times New Roman" pitchFamily="34" charset="-120"/>
               </a:rPr>
-              <a:t>Economy: </a:t>
+              <a:t>High building cost: </a:t>
             </a:r>
             <a:pPr algn="l" indent="0" marL="0">
               <a:spcAft>
@@ -14421,7 +14716,7 @@
                 <a:ea typeface="Times New Roman" pitchFamily="34" charset="-122"/>
                 <a:cs typeface="Times New Roman" pitchFamily="34" charset="-120"/>
               </a:rPr>
-              <a:t>They bring revenue, jobs and cheap supply of oil, gas and water.</a:t>
+              <a:t>Pipes are very expensive to lay.</a:t>
             </a:r>
             <a:endParaRPr lang="en-US" sz="4000" dirty="0"/>
           </a:p>
@@ -14441,7 +14736,7 @@
                 <a:ea typeface="Times New Roman" pitchFamily="34" charset="-122"/>
                 <a:cs typeface="Times New Roman" pitchFamily="34" charset="-120"/>
               </a:rPr>
-              <a:t>Example: </a:t>
+              <a:t>Liquids and gases only: </a:t>
             </a:r>
             <a:pPr algn="l" indent="0" marL="0">
               <a:spcAft>
@@ -14458,7 +14753,7 @@
                 <a:ea typeface="Times New Roman" pitchFamily="34" charset="-122"/>
                 <a:cs typeface="Times New Roman" pitchFamily="34" charset="-120"/>
               </a:rPr>
-              <a:t>The Chad–Cameroon pipeline carries oil from Doba to Kribi.</a:t>
+              <a:t>They cannot carry solid goods.</a:t>
             </a:r>
             <a:endParaRPr lang="en-US" sz="4000" dirty="0"/>
           </a:p>
@@ -14635,7 +14930,7 @@
                 <a:ea typeface="Times New Roman" pitchFamily="34" charset="-122"/>
                 <a:cs typeface="Times New Roman" pitchFamily="34" charset="-120"/>
               </a:rPr>
-              <a:t>2. Impact on the Economy and the Environment (continued)</a:t>
+              <a:t>1. Advantages and Disadvantages</a:t>
             </a:r>
             <a:endParaRPr lang="en-US" sz="3600" dirty="0"/>
           </a:p>
@@ -14649,8 +14944,47 @@
         </p:nvSpPr>
         <p:spPr>
           <a:xfrm>
-            <a:off x="5349240" y="1783080"/>
-            <a:ext cx="6522415" cy="4663440"/>
+            <a:off x="5349240" y="1737360"/>
+            <a:ext cx="6522415" cy="457200"/>
+          </a:xfrm>
+          <a:prstGeom prst="rect">
+            <a:avLst/>
+          </a:prstGeom>
+          <a:noFill/>
+          <a:ln/>
+        </p:spPr>
+        <p:txBody>
+          <a:bodyPr wrap="square" lIns="0" tIns="0" rIns="0" bIns="0" rtlCol="0" anchor="ctr"/>
+          <a:lstStyle/>
+          <a:p>
+            <a:pPr algn="l" indent="0" marL="0">
+              <a:buNone/>
+            </a:pPr>
+            <a:r>
+              <a:rPr lang="en-US" sz="2700" b="1" dirty="0">
+                <a:solidFill>
+                  <a:srgbClr val="990011"/>
+                </a:solidFill>
+                <a:latin typeface="Times New Roman" pitchFamily="34" charset="0"/>
+                <a:ea typeface="Times New Roman" pitchFamily="34" charset="-122"/>
+                <a:cs typeface="Times New Roman" pitchFamily="34" charset="-120"/>
+              </a:rPr>
+              <a:t>B) Disadvantages and Risks (continued)</a:t>
+            </a:r>
+            <a:endParaRPr lang="en-US" sz="2700" dirty="0"/>
+          </a:p>
+        </p:txBody>
+      </p:sp>
+      <p:sp>
+        <p:nvSpPr>
+          <p:cNvPr id="6" name="Text 3"/>
+          <p:cNvSpPr/>
+          <p:nvPr/>
+        </p:nvSpPr>
+        <p:spPr>
+          <a:xfrm>
+            <a:off x="5349240" y="2240280"/>
+            <a:ext cx="6522415" cy="4206240"/>
           </a:xfrm>
           <a:prstGeom prst="rect">
             <a:avLst/>
@@ -14677,7 +15011,7 @@
                 <a:ea typeface="Times New Roman" pitchFamily="34" charset="-122"/>
                 <a:cs typeface="Times New Roman" pitchFamily="34" charset="-120"/>
               </a:rPr>
-              <a:t>Environment: </a:t>
+              <a:t>Leaks, theft and sabotage: </a:t>
             </a:r>
             <a:pPr algn="l" indent="0" marL="0">
               <a:spcAft>
@@ -14694,7 +15028,7 @@
                 <a:ea typeface="Times New Roman" pitchFamily="34" charset="-122"/>
                 <a:cs typeface="Times New Roman" pitchFamily="34" charset="-120"/>
               </a:rPr>
-              <a:t>Leaks pollute soil and water and building destroys vegetation.</a:t>
+              <a:t>Oil can escape or be stolen.</a:t>
             </a:r>
             <a:endParaRPr lang="en-US" sz="4000" dirty="0"/>
           </a:p>
@@ -15051,48 +15385,9 @@
           </a:p>
         </p:txBody>
       </p:sp>
-      <p:sp>
-        <p:nvSpPr>
-          <p:cNvPr id="3" name="Text 1"/>
-          <p:cNvSpPr/>
-          <p:nvPr/>
-        </p:nvSpPr>
-        <p:spPr>
-          <a:xfrm>
-            <a:off x="457200" y="1005840"/>
-            <a:ext cx="11277295" cy="731520"/>
-          </a:xfrm>
-          <a:prstGeom prst="rect">
-            <a:avLst/>
-          </a:prstGeom>
-          <a:noFill/>
-          <a:ln/>
-        </p:spPr>
-        <p:txBody>
-          <a:bodyPr wrap="square" lIns="0" tIns="0" rIns="0" bIns="0" rtlCol="0" anchor="ctr"/>
-          <a:lstStyle/>
-          <a:p>
-            <a:pPr algn="ctr" indent="0" marL="0">
-              <a:buNone/>
-            </a:pPr>
-            <a:r>
-              <a:rPr lang="en-US" sz="3600" b="1" dirty="0">
-                <a:solidFill>
-                  <a:srgbClr val="990011"/>
-                </a:solidFill>
-                <a:latin typeface="Times New Roman" pitchFamily="34" charset="0"/>
-                <a:ea typeface="Times New Roman" pitchFamily="34" charset="-122"/>
-                <a:cs typeface="Times New Roman" pitchFamily="34" charset="-120"/>
-              </a:rPr>
-              <a:t>2. Impact on the Economy and the Environment</a:t>
-            </a:r>
-            <a:endParaRPr lang="en-US" sz="3600" dirty="0"/>
-          </a:p>
-        </p:txBody>
-      </p:sp>
       <p:pic>
         <p:nvPicPr>
-          <p:cNvPr id="4" name="Image 0" descr="/home/claude/f4/img/v2/env_pollution_big.png">    </p:cNvPr>
+          <p:cNvPr id="3" name="Image 0" descr="/home/claude/f4/img/minesec_sheet.png">    </p:cNvPr>
           <p:cNvPicPr>
             <a:picLocks noChangeAspect="1"/>
           </p:cNvPicPr>
@@ -15106,8 +15401,8 @@
         </p:blipFill>
         <p:spPr>
           <a:xfrm>
-            <a:off x="629930" y="1783080"/>
-            <a:ext cx="10931835" cy="4270248"/>
+            <a:off x="0" y="658368"/>
+            <a:ext cx="2468880" cy="5833872"/>
           </a:xfrm>
           <a:prstGeom prst="rect">
             <a:avLst/>
@@ -15116,14 +15411,14 @@
       </p:pic>
       <p:sp>
         <p:nvSpPr>
-          <p:cNvPr id="5" name="Text 2"/>
+          <p:cNvPr id="4" name="Text 1"/>
           <p:cNvSpPr/>
           <p:nvPr/>
         </p:nvSpPr>
         <p:spPr>
           <a:xfrm>
-            <a:off x="457200" y="6089904"/>
-            <a:ext cx="11277295" cy="347472"/>
+            <a:off x="2697480" y="1005840"/>
+            <a:ext cx="9174175" cy="731520"/>
           </a:xfrm>
           <a:prstGeom prst="rect">
             <a:avLst/>
@@ -15132,24 +15427,142 @@
           <a:ln/>
         </p:spPr>
         <p:txBody>
-          <a:bodyPr wrap="square" lIns="0" tIns="0" rIns="0" bIns="0" rtlCol="0" anchor="ctr"/>
+          <a:bodyPr wrap="square" lIns="0" tIns="0" rIns="0" bIns="0" rtlCol="0" anchor="ctr">
+            <a:normAutofit/>
+          </a:bodyPr>
           <a:lstStyle/>
           <a:p>
             <a:pPr algn="ctr" indent="0" marL="0">
               <a:buNone/>
             </a:pPr>
             <a:r>
-              <a:rPr lang="en-US" sz="1800" i="1" dirty="0">
-                <a:solidFill>
-                  <a:srgbClr val="555555"/>
+              <a:rPr lang="en-US" sz="3600" b="1" dirty="0">
+                <a:solidFill>
+                  <a:srgbClr val="990011"/>
                 </a:solidFill>
                 <a:latin typeface="Times New Roman" pitchFamily="34" charset="0"/>
                 <a:ea typeface="Times New Roman" pitchFamily="34" charset="-122"/>
                 <a:cs typeface="Times New Roman" pitchFamily="34" charset="-120"/>
               </a:rPr>
-              <a:t>Illustration: environmental pollution</a:t>
-            </a:r>
-            <a:endParaRPr lang="en-US" sz="1800" dirty="0"/>
+              <a:t>2. Impact on the Economy and the Environment</a:t>
+            </a:r>
+            <a:endParaRPr lang="en-US" sz="3600" dirty="0"/>
+          </a:p>
+        </p:txBody>
+      </p:sp>
+      <p:sp>
+        <p:nvSpPr>
+          <p:cNvPr id="5" name="Text 2"/>
+          <p:cNvSpPr/>
+          <p:nvPr/>
+        </p:nvSpPr>
+        <p:spPr>
+          <a:xfrm>
+            <a:off x="2697480" y="1783080"/>
+            <a:ext cx="9174175" cy="4663440"/>
+          </a:xfrm>
+          <a:prstGeom prst="rect">
+            <a:avLst/>
+          </a:prstGeom>
+          <a:noFill/>
+          <a:ln/>
+        </p:spPr>
+        <p:txBody>
+          <a:bodyPr wrap="square" lIns="0" tIns="0" rIns="0" bIns="0" rtlCol="0" anchor="t"/>
+          <a:lstStyle/>
+          <a:p>
+            <a:pPr algn="l" indent="0" marL="0">
+              <a:spcAft>
+                <a:spcPts val="800"/>
+              </a:spcAft>
+              <a:buNone/>
+            </a:pPr>
+            <a:r>
+              <a:rPr lang="en-US" sz="4000" i="1" dirty="0">
+                <a:solidFill>
+                  <a:srgbClr val="111111"/>
+                </a:solidFill>
+                <a:latin typeface="Times New Roman" pitchFamily="34" charset="0"/>
+                <a:ea typeface="Times New Roman" pitchFamily="34" charset="-122"/>
+                <a:cs typeface="Times New Roman" pitchFamily="34" charset="-120"/>
+              </a:rPr>
+              <a:t>Pipelines have the following impacts:</a:t>
+            </a:r>
+            <a:endParaRPr lang="en-US" sz="4000" dirty="0"/>
+          </a:p>
+          <a:p>
+            <a:pPr algn="l" indent="0" marL="0">
+              <a:spcAft>
+                <a:spcPts val="800"/>
+              </a:spcAft>
+              <a:buNone/>
+            </a:pPr>
+            <a:r>
+              <a:rPr lang="en-US" sz="4000" b="1" dirty="0">
+                <a:solidFill>
+                  <a:srgbClr val="111111"/>
+                </a:solidFill>
+                <a:latin typeface="Times New Roman" pitchFamily="34" charset="0"/>
+                <a:ea typeface="Times New Roman" pitchFamily="34" charset="-122"/>
+                <a:cs typeface="Times New Roman" pitchFamily="34" charset="-120"/>
+              </a:rPr>
+              <a:t>Economy: </a:t>
+            </a:r>
+            <a:pPr algn="l" indent="0" marL="0">
+              <a:spcAft>
+                <a:spcPts val="800"/>
+              </a:spcAft>
+              <a:buNone/>
+            </a:pPr>
+            <a:r>
+              <a:rPr lang="en-US" sz="4000" dirty="0">
+                <a:solidFill>
+                  <a:srgbClr val="111111"/>
+                </a:solidFill>
+                <a:latin typeface="Times New Roman" pitchFamily="34" charset="0"/>
+                <a:ea typeface="Times New Roman" pitchFamily="34" charset="-122"/>
+                <a:cs typeface="Times New Roman" pitchFamily="34" charset="-120"/>
+              </a:rPr>
+              <a:t>They bring revenue, jobs and cheap supply of oil, gas and water.</a:t>
+            </a:r>
+            <a:endParaRPr lang="en-US" sz="4000" dirty="0"/>
+          </a:p>
+          <a:p>
+            <a:pPr algn="l" indent="0" marL="0">
+              <a:spcAft>
+                <a:spcPts val="800"/>
+              </a:spcAft>
+              <a:buNone/>
+            </a:pPr>
+            <a:r>
+              <a:rPr lang="en-US" sz="4000" b="1" dirty="0">
+                <a:solidFill>
+                  <a:srgbClr val="111111"/>
+                </a:solidFill>
+                <a:latin typeface="Times New Roman" pitchFamily="34" charset="0"/>
+                <a:ea typeface="Times New Roman" pitchFamily="34" charset="-122"/>
+                <a:cs typeface="Times New Roman" pitchFamily="34" charset="-120"/>
+              </a:rPr>
+              <a:t>Example: </a:t>
+            </a:r>
+            <a:pPr algn="l" indent="0" marL="0">
+              <a:spcAft>
+                <a:spcPts val="800"/>
+              </a:spcAft>
+              <a:buNone/>
+            </a:pPr>
+            <a:r>
+              <a:rPr lang="en-US" sz="4000" dirty="0">
+                <a:solidFill>
+                  <a:srgbClr val="111111"/>
+                </a:solidFill>
+                <a:latin typeface="Times New Roman" pitchFamily="34" charset="0"/>
+                <a:ea typeface="Times New Roman" pitchFamily="34" charset="-122"/>
+                <a:cs typeface="Times New Roman" pitchFamily="34" charset="-120"/>
+              </a:rPr>
+              <a:t>The Chad–Cameroon pipeline carries oil from Doba to Kribi.</a:t>
+            </a:r>
+            <a:endParaRPr lang="en-US" sz="4000" dirty="0"/>
           </a:p>
         </p:txBody>
       </p:sp>
@@ -15259,7 +15672,7 @@
                 <a:ea typeface="Calibri" pitchFamily="34" charset="-122"/>
                 <a:cs typeface="Calibri" pitchFamily="34" charset="-120"/>
               </a:rPr>
-              <a:t>FORMATIVE EVALUATION</a:t>
+              <a:t>BOARD SUMMARY</a:t>
             </a:r>
             <a:endParaRPr lang="en-US" sz="1400" dirty="0"/>
           </a:p>
@@ -15324,7 +15737,7 @@
                 <a:ea typeface="Times New Roman" pitchFamily="34" charset="-122"/>
                 <a:cs typeface="Times New Roman" pitchFamily="34" charset="-120"/>
               </a:rPr>
-              <a:t>Evaluation 1</a:t>
+              <a:t>2. Impact on the Economy and the Environment (continued)</a:t>
             </a:r>
             <a:endParaRPr lang="en-US" sz="3600" dirty="0"/>
           </a:p>
@@ -15358,7 +15771,7 @@
               <a:buNone/>
             </a:pPr>
             <a:r>
-              <a:rPr lang="en-US" sz="4000" dirty="0">
+              <a:rPr lang="en-US" sz="4000" b="1" dirty="0">
                 <a:solidFill>
                   <a:srgbClr val="111111"/>
                 </a:solidFill>
@@ -15366,7 +15779,24 @@
                 <a:ea typeface="Times New Roman" pitchFamily="34" charset="-122"/>
                 <a:cs typeface="Times New Roman" pitchFamily="34" charset="-120"/>
               </a:rPr>
-              <a:t>What is a pipeline?</a:t>
+              <a:t>Environment: </a:t>
+            </a:r>
+            <a:pPr algn="l" indent="0" marL="0">
+              <a:spcAft>
+                <a:spcPts val="800"/>
+              </a:spcAft>
+              <a:buNone/>
+            </a:pPr>
+            <a:r>
+              <a:rPr lang="en-US" sz="4000" dirty="0">
+                <a:solidFill>
+                  <a:srgbClr val="111111"/>
+                </a:solidFill>
+                <a:latin typeface="Times New Roman" pitchFamily="34" charset="0"/>
+                <a:ea typeface="Times New Roman" pitchFamily="34" charset="-122"/>
+                <a:cs typeface="Times New Roman" pitchFamily="34" charset="-120"/>
+              </a:rPr>
+              <a:t>Leaks pollute soil and water and building destroys vegetation.</a:t>
             </a:r>
             <a:endParaRPr lang="en-US" sz="4000" dirty="0"/>
           </a:p>
@@ -15478,15 +15908,54 @@
                 <a:ea typeface="Calibri" pitchFamily="34" charset="-122"/>
                 <a:cs typeface="Calibri" pitchFamily="34" charset="-120"/>
               </a:rPr>
-              <a:t>FORMATIVE EVALUATION</a:t>
+              <a:t>BOARD SUMMARY</a:t>
             </a:r>
             <a:endParaRPr lang="en-US" sz="1400" dirty="0"/>
+          </a:p>
+        </p:txBody>
+      </p:sp>
+      <p:sp>
+        <p:nvSpPr>
+          <p:cNvPr id="3" name="Text 1"/>
+          <p:cNvSpPr/>
+          <p:nvPr/>
+        </p:nvSpPr>
+        <p:spPr>
+          <a:xfrm>
+            <a:off x="457200" y="1005840"/>
+            <a:ext cx="11277295" cy="731520"/>
+          </a:xfrm>
+          <a:prstGeom prst="rect">
+            <a:avLst/>
+          </a:prstGeom>
+          <a:noFill/>
+          <a:ln/>
+        </p:spPr>
+        <p:txBody>
+          <a:bodyPr wrap="square" lIns="0" tIns="0" rIns="0" bIns="0" rtlCol="0" anchor="ctr"/>
+          <a:lstStyle/>
+          <a:p>
+            <a:pPr algn="ctr" indent="0" marL="0">
+              <a:buNone/>
+            </a:pPr>
+            <a:r>
+              <a:rPr lang="en-US" sz="3600" b="1" dirty="0">
+                <a:solidFill>
+                  <a:srgbClr val="990011"/>
+                </a:solidFill>
+                <a:latin typeface="Times New Roman" pitchFamily="34" charset="0"/>
+                <a:ea typeface="Times New Roman" pitchFamily="34" charset="-122"/>
+                <a:cs typeface="Times New Roman" pitchFamily="34" charset="-120"/>
+              </a:rPr>
+              <a:t>2. Impact on the Economy and the Environment</a:t>
+            </a:r>
+            <a:endParaRPr lang="en-US" sz="3600" dirty="0"/>
           </a:p>
         </p:txBody>
       </p:sp>
       <p:pic>
         <p:nvPicPr>
-          <p:cNvPr id="3" name="Image 0" descr="/home/claude/f4/img/minesec_sheet.png">    </p:cNvPr>
+          <p:cNvPr id="4" name="Image 0" descr="/home/claude/f4/img/v2/env_pollution_big.png">    </p:cNvPr>
           <p:cNvPicPr>
             <a:picLocks noChangeAspect="1"/>
           </p:cNvPicPr>
@@ -15500,8 +15969,8 @@
         </p:blipFill>
         <p:spPr>
           <a:xfrm>
-            <a:off x="0" y="658368"/>
-            <a:ext cx="5120640" cy="5833872"/>
+            <a:off x="629930" y="1783080"/>
+            <a:ext cx="10931835" cy="4270248"/>
           </a:xfrm>
           <a:prstGeom prst="rect">
             <a:avLst/>
@@ -15510,14 +15979,14 @@
       </p:pic>
       <p:sp>
         <p:nvSpPr>
-          <p:cNvPr id="4" name="Text 1"/>
+          <p:cNvPr id="5" name="Text 2"/>
           <p:cNvSpPr/>
           <p:nvPr/>
         </p:nvSpPr>
         <p:spPr>
           <a:xfrm>
-            <a:off x="5349240" y="1005840"/>
-            <a:ext cx="6522415" cy="731520"/>
+            <a:off x="457200" y="6089904"/>
+            <a:ext cx="11277295" cy="347472"/>
           </a:xfrm>
           <a:prstGeom prst="rect">
             <a:avLst/>
@@ -15526,68 +15995,24 @@
           <a:ln/>
         </p:spPr>
         <p:txBody>
-          <a:bodyPr wrap="square" lIns="0" tIns="0" rIns="0" bIns="0" rtlCol="0" anchor="ctr">
-            <a:normAutofit/>
-          </a:bodyPr>
+          <a:bodyPr wrap="square" lIns="0" tIns="0" rIns="0" bIns="0" rtlCol="0" anchor="ctr"/>
           <a:lstStyle/>
           <a:p>
             <a:pPr algn="ctr" indent="0" marL="0">
               <a:buNone/>
             </a:pPr>
             <a:r>
-              <a:rPr lang="en-US" sz="3600" b="1" dirty="0">
-                <a:solidFill>
-                  <a:srgbClr val="990011"/>
+              <a:rPr lang="en-US" sz="1800" i="1" dirty="0">
+                <a:solidFill>
+                  <a:srgbClr val="555555"/>
                 </a:solidFill>
                 <a:latin typeface="Times New Roman" pitchFamily="34" charset="0"/>
                 <a:ea typeface="Times New Roman" pitchFamily="34" charset="-122"/>
                 <a:cs typeface="Times New Roman" pitchFamily="34" charset="-120"/>
               </a:rPr>
-              <a:t>Expected Answer</a:t>
-            </a:r>
-            <a:endParaRPr lang="en-US" sz="3600" dirty="0"/>
-          </a:p>
-        </p:txBody>
-      </p:sp>
-      <p:sp>
-        <p:nvSpPr>
-          <p:cNvPr id="5" name="Text 2"/>
-          <p:cNvSpPr/>
-          <p:nvPr/>
-        </p:nvSpPr>
-        <p:spPr>
-          <a:xfrm>
-            <a:off x="5349240" y="1783080"/>
-            <a:ext cx="6522415" cy="4663440"/>
-          </a:xfrm>
-          <a:prstGeom prst="rect">
-            <a:avLst/>
-          </a:prstGeom>
-          <a:noFill/>
-          <a:ln/>
-        </p:spPr>
-        <p:txBody>
-          <a:bodyPr wrap="square" lIns="0" tIns="0" rIns="0" bIns="0" rtlCol="0" anchor="t"/>
-          <a:lstStyle/>
-          <a:p>
-            <a:pPr algn="l" indent="0" marL="0">
-              <a:spcAft>
-                <a:spcPts val="800"/>
-              </a:spcAft>
-              <a:buNone/>
-            </a:pPr>
-            <a:r>
-              <a:rPr lang="en-US" sz="4000" dirty="0">
-                <a:solidFill>
-                  <a:srgbClr val="111111"/>
-                </a:solidFill>
-                <a:latin typeface="Times New Roman" pitchFamily="34" charset="0"/>
-                <a:ea typeface="Times New Roman" pitchFamily="34" charset="-122"/>
-                <a:cs typeface="Times New Roman" pitchFamily="34" charset="-120"/>
-              </a:rPr>
-              <a:t>A line of pipes carrying liquids or gases.</a:t>
-            </a:r>
-            <a:endParaRPr lang="en-US" sz="4000" dirty="0"/>
+              <a:t>Illustration: environmental pollution</a:t>
+            </a:r>
+            <a:endParaRPr lang="en-US" sz="1800" dirty="0"/>
           </a:p>
         </p:txBody>
       </p:sp>
@@ -15762,7 +16187,7 @@
                 <a:ea typeface="Times New Roman" pitchFamily="34" charset="-122"/>
                 <a:cs typeface="Times New Roman" pitchFamily="34" charset="-120"/>
               </a:rPr>
-              <a:t>Evaluation 2</a:t>
+              <a:t>Evaluation 1</a:t>
             </a:r>
             <a:endParaRPr lang="en-US" sz="3600" dirty="0"/>
           </a:p>
@@ -15804,7 +16229,7 @@
                 <a:ea typeface="Times New Roman" pitchFamily="34" charset="-122"/>
                 <a:cs typeface="Times New Roman" pitchFamily="34" charset="-120"/>
               </a:rPr>
-              <a:t>Give one economic and one environmental impact.</a:t>
+              <a:t>What is a pipeline?</a:t>
             </a:r>
             <a:endParaRPr lang="en-US" sz="4000" dirty="0"/>
           </a:p>
@@ -16023,7 +16448,7 @@
                 <a:ea typeface="Times New Roman" pitchFamily="34" charset="-122"/>
                 <a:cs typeface="Times New Roman" pitchFamily="34" charset="-120"/>
               </a:rPr>
-              <a:t>Revenue; oil pollution.</a:t>
+              <a:t>A line of pipes carrying liquids or gases.</a:t>
             </a:r>
             <a:endParaRPr lang="en-US" sz="4000" dirty="0"/>
           </a:p>
@@ -16135,7 +16560,7 @@
                 <a:ea typeface="Calibri" pitchFamily="34" charset="-122"/>
                 <a:cs typeface="Calibri" pitchFamily="34" charset="-120"/>
               </a:rPr>
-              <a:t>REMEDIATION</a:t>
+              <a:t>FORMATIVE EVALUATION</a:t>
             </a:r>
             <a:endParaRPr lang="en-US" sz="1400" dirty="0"/>
           </a:p>
@@ -16158,7 +16583,7 @@
         <p:spPr>
           <a:xfrm>
             <a:off x="0" y="658368"/>
-            <a:ext cx="3840480" cy="5833872"/>
+            <a:ext cx="5120640" cy="5833872"/>
           </a:xfrm>
           <a:prstGeom prst="rect">
             <a:avLst/>
@@ -16173,8 +16598,8 @@
         </p:nvSpPr>
         <p:spPr>
           <a:xfrm>
-            <a:off x="4069080" y="1005840"/>
-            <a:ext cx="7802575" cy="731520"/>
+            <a:off x="5349240" y="1005840"/>
+            <a:ext cx="6522415" cy="731520"/>
           </a:xfrm>
           <a:prstGeom prst="rect">
             <a:avLst/>
@@ -16200,7 +16625,7 @@
                 <a:ea typeface="Times New Roman" pitchFamily="34" charset="-122"/>
                 <a:cs typeface="Times New Roman" pitchFamily="34" charset="-120"/>
               </a:rPr>
-              <a:t>Remediation</a:t>
+              <a:t>Evaluation 2</a:t>
             </a:r>
             <a:endParaRPr lang="en-US" sz="3600" dirty="0"/>
           </a:p>
@@ -16214,8 +16639,8 @@
         </p:nvSpPr>
         <p:spPr>
           <a:xfrm>
-            <a:off x="4069080" y="1783080"/>
-            <a:ext cx="7802575" cy="4663440"/>
+            <a:off x="5349240" y="1783080"/>
+            <a:ext cx="6522415" cy="4663440"/>
           </a:xfrm>
           <a:prstGeom prst="rect">
             <a:avLst/>
@@ -16234,7 +16659,7 @@
               <a:buNone/>
             </a:pPr>
             <a:r>
-              <a:rPr lang="en-US" sz="4000" b="1" dirty="0">
+              <a:rPr lang="en-US" sz="4000" dirty="0">
                 <a:solidFill>
                   <a:srgbClr val="111111"/>
                 </a:solidFill>
@@ -16242,73 +16667,7 @@
                 <a:ea typeface="Times New Roman" pitchFamily="34" charset="-122"/>
                 <a:cs typeface="Times New Roman" pitchFamily="34" charset="-120"/>
               </a:rPr>
-              <a:t>Fill in the blanks:</a:t>
-            </a:r>
-            <a:endParaRPr lang="en-US" sz="4000" dirty="0"/>
-          </a:p>
-          <a:p>
-            <a:pPr algn="l" marL="342900" indent="-342900">
-              <a:spcAft>
-                <a:spcPts val="800"/>
-              </a:spcAft>
-              <a:buSzPct val="100000"/>
-              <a:buFont typeface="+mj-lt"/>
-              <a:buAutoNum type="arabicPeriod" startAt="1"/>
-            </a:pPr>
-            <a:r>
-              <a:rPr lang="en-US" sz="4000" dirty="0">
-                <a:solidFill>
-                  <a:srgbClr val="111111"/>
-                </a:solidFill>
-                <a:latin typeface="Times New Roman" pitchFamily="34" charset="0"/>
-                <a:ea typeface="Times New Roman" pitchFamily="34" charset="-122"/>
-                <a:cs typeface="Times New Roman" pitchFamily="34" charset="-120"/>
-              </a:rPr>
-              <a:t>Pipelines carry liquids and ______.</a:t>
-            </a:r>
-            <a:endParaRPr lang="en-US" sz="4000" dirty="0"/>
-          </a:p>
-          <a:p>
-            <a:pPr algn="l" marL="342900" indent="-342900">
-              <a:spcAft>
-                <a:spcPts val="800"/>
-              </a:spcAft>
-              <a:buSzPct val="100000"/>
-              <a:buFont typeface="+mj-lt"/>
-              <a:buAutoNum type="arabicPeriod" startAt="1"/>
-            </a:pPr>
-            <a:r>
-              <a:rPr lang="en-US" sz="4000" dirty="0">
-                <a:solidFill>
-                  <a:srgbClr val="111111"/>
-                </a:solidFill>
-                <a:latin typeface="Times New Roman" pitchFamily="34" charset="0"/>
-                <a:ea typeface="Times New Roman" pitchFamily="34" charset="-122"/>
-                <a:cs typeface="Times New Roman" pitchFamily="34" charset="-120"/>
-              </a:rPr>
-              <a:t>The Chad–Cameroon pipeline ends at ______.</a:t>
-            </a:r>
-            <a:endParaRPr lang="en-US" sz="4000" dirty="0"/>
-          </a:p>
-          <a:p>
-            <a:pPr algn="l" marL="342900" indent="-342900">
-              <a:spcAft>
-                <a:spcPts val="800"/>
-              </a:spcAft>
-              <a:buSzPct val="100000"/>
-              <a:buFont typeface="+mj-lt"/>
-              <a:buAutoNum type="arabicPeriod" startAt="1"/>
-            </a:pPr>
-            <a:r>
-              <a:rPr lang="en-US" sz="4000" dirty="0">
-                <a:solidFill>
-                  <a:srgbClr val="111111"/>
-                </a:solidFill>
-                <a:latin typeface="Times New Roman" pitchFamily="34" charset="0"/>
-                <a:ea typeface="Times New Roman" pitchFamily="34" charset="-122"/>
-                <a:cs typeface="Times New Roman" pitchFamily="34" charset="-120"/>
-              </a:rPr>
-              <a:t>A pipeline leak causes ______.</a:t>
+              <a:t>Give one economic and one environmental impact.</a:t>
             </a:r>
             <a:endParaRPr lang="en-US" sz="4000" dirty="0"/>
           </a:p>
@@ -16420,7 +16779,7 @@
                 <a:ea typeface="Calibri" pitchFamily="34" charset="-122"/>
                 <a:cs typeface="Calibri" pitchFamily="34" charset="-120"/>
               </a:rPr>
-              <a:t>HOMEWORK</a:t>
+              <a:t>FORMATIVE EVALUATION</a:t>
             </a:r>
             <a:endParaRPr lang="en-US" sz="1400" dirty="0"/>
           </a:p>
@@ -16485,7 +16844,7 @@
                 <a:ea typeface="Times New Roman" pitchFamily="34" charset="-122"/>
                 <a:cs typeface="Times New Roman" pitchFamily="34" charset="-120"/>
               </a:rPr>
-              <a:t>Homework</a:t>
+              <a:t>Expected Answer</a:t>
             </a:r>
             <a:endParaRPr lang="en-US" sz="3600" dirty="0"/>
           </a:p>
@@ -16527,7 +16886,7 @@
                 <a:ea typeface="Times New Roman" pitchFamily="34" charset="-122"/>
                 <a:cs typeface="Times New Roman" pitchFamily="34" charset="-120"/>
               </a:rPr>
-              <a:t>Draw a sketch map of the Chad–Cameroon pipeline.</a:t>
+              <a:t>Revenue; oil pollution.</a:t>
             </a:r>
             <a:endParaRPr lang="en-US" sz="4000" dirty="0"/>
           </a:p>
@@ -16639,7 +16998,7 @@
                 <a:ea typeface="Calibri" pitchFamily="34" charset="-122"/>
                 <a:cs typeface="Calibri" pitchFamily="34" charset="-120"/>
               </a:rPr>
-              <a:t>NEXT LESSON</a:t>
+              <a:t>REMEDIATION</a:t>
             </a:r>
             <a:endParaRPr lang="en-US" sz="1400" dirty="0"/>
           </a:p>
@@ -16662,7 +17021,7 @@
         <p:spPr>
           <a:xfrm>
             <a:off x="0" y="658368"/>
-            <a:ext cx="5120640" cy="5833872"/>
+            <a:ext cx="3840480" cy="5833872"/>
           </a:xfrm>
           <a:prstGeom prst="rect">
             <a:avLst/>
@@ -16677,8 +17036,8 @@
         </p:nvSpPr>
         <p:spPr>
           <a:xfrm>
-            <a:off x="5349240" y="1005840"/>
-            <a:ext cx="6522415" cy="731520"/>
+            <a:off x="4069080" y="1005840"/>
+            <a:ext cx="7802575" cy="731520"/>
           </a:xfrm>
           <a:prstGeom prst="rect">
             <a:avLst/>
@@ -16704,7 +17063,7 @@
                 <a:ea typeface="Times New Roman" pitchFamily="34" charset="-122"/>
                 <a:cs typeface="Times New Roman" pitchFamily="34" charset="-120"/>
               </a:rPr>
-              <a:t>Next Lesson</a:t>
+              <a:t>Remediation</a:t>
             </a:r>
             <a:endParaRPr lang="en-US" sz="3600" dirty="0"/>
           </a:p>
@@ -16718,8 +17077,8 @@
         </p:nvSpPr>
         <p:spPr>
           <a:xfrm>
-            <a:off x="5349240" y="1783080"/>
-            <a:ext cx="6522415" cy="4663440"/>
+            <a:off x="4069080" y="1783080"/>
+            <a:ext cx="7802575" cy="4663440"/>
           </a:xfrm>
           <a:prstGeom prst="rect">
             <a:avLst/>
@@ -16728,10 +17087,10 @@
           <a:ln/>
         </p:spPr>
         <p:txBody>
-          <a:bodyPr wrap="square" lIns="0" tIns="0" rIns="0" bIns="0" rtlCol="0" anchor="ctr"/>
-          <a:lstStyle/>
-          <a:p>
-            <a:pPr algn="ctr" indent="0" marL="0">
+          <a:bodyPr wrap="square" lIns="0" tIns="0" rIns="0" bIns="0" rtlCol="0" anchor="t"/>
+          <a:lstStyle/>
+          <a:p>
+            <a:pPr algn="l" indent="0" marL="0">
               <a:spcAft>
                 <a:spcPts val="800"/>
               </a:spcAft>
@@ -16746,27 +17105,73 @@
                 <a:ea typeface="Times New Roman" pitchFamily="34" charset="-122"/>
                 <a:cs typeface="Times New Roman" pitchFamily="34" charset="-120"/>
               </a:rPr>
-              <a:t>Our next lesson will be on:</a:t>
+              <a:t>Fill in the blanks:</a:t>
             </a:r>
             <a:endParaRPr lang="en-US" sz="4000" dirty="0"/>
           </a:p>
           <a:p>
-            <a:pPr algn="ctr" indent="0" marL="0">
+            <a:pPr algn="l" marL="342900" indent="-342900">
               <a:spcAft>
                 <a:spcPts val="800"/>
               </a:spcAft>
-              <a:buNone/>
+              <a:buSzPct val="100000"/>
+              <a:buFont typeface="+mj-lt"/>
+              <a:buAutoNum type="arabicPeriod" startAt="1"/>
             </a:pPr>
             <a:r>
-              <a:rPr lang="en-US" sz="4000" b="1" dirty="0">
-                <a:solidFill>
-                  <a:srgbClr val="990011"/>
+              <a:rPr lang="en-US" sz="4000" dirty="0">
+                <a:solidFill>
+                  <a:srgbClr val="111111"/>
                 </a:solidFill>
                 <a:latin typeface="Times New Roman" pitchFamily="34" charset="0"/>
                 <a:ea typeface="Times New Roman" pitchFamily="34" charset="-122"/>
                 <a:cs typeface="Times New Roman" pitchFamily="34" charset="-120"/>
               </a:rPr>
-              <a:t>Lesson 14: Globalisation</a:t>
+              <a:t>Pipelines carry liquids and ______.</a:t>
+            </a:r>
+            <a:endParaRPr lang="en-US" sz="4000" dirty="0"/>
+          </a:p>
+          <a:p>
+            <a:pPr algn="l" marL="342900" indent="-342900">
+              <a:spcAft>
+                <a:spcPts val="800"/>
+              </a:spcAft>
+              <a:buSzPct val="100000"/>
+              <a:buFont typeface="+mj-lt"/>
+              <a:buAutoNum type="arabicPeriod" startAt="1"/>
+            </a:pPr>
+            <a:r>
+              <a:rPr lang="en-US" sz="4000" dirty="0">
+                <a:solidFill>
+                  <a:srgbClr val="111111"/>
+                </a:solidFill>
+                <a:latin typeface="Times New Roman" pitchFamily="34" charset="0"/>
+                <a:ea typeface="Times New Roman" pitchFamily="34" charset="-122"/>
+                <a:cs typeface="Times New Roman" pitchFamily="34" charset="-120"/>
+              </a:rPr>
+              <a:t>The Chad–Cameroon pipeline ends at ______.</a:t>
+            </a:r>
+            <a:endParaRPr lang="en-US" sz="4000" dirty="0"/>
+          </a:p>
+          <a:p>
+            <a:pPr algn="l" marL="342900" indent="-342900">
+              <a:spcAft>
+                <a:spcPts val="800"/>
+              </a:spcAft>
+              <a:buSzPct val="100000"/>
+              <a:buFont typeface="+mj-lt"/>
+              <a:buAutoNum type="arabicPeriod" startAt="1"/>
+            </a:pPr>
+            <a:r>
+              <a:rPr lang="en-US" sz="4000" dirty="0">
+                <a:solidFill>
+                  <a:srgbClr val="111111"/>
+                </a:solidFill>
+                <a:latin typeface="Times New Roman" pitchFamily="34" charset="0"/>
+                <a:ea typeface="Times New Roman" pitchFamily="34" charset="-122"/>
+                <a:cs typeface="Times New Roman" pitchFamily="34" charset="-120"/>
+              </a:rPr>
+              <a:t>A pipeline leak causes ______.</a:t>
             </a:r>
             <a:endParaRPr lang="en-US" sz="4000" dirty="0"/>
           </a:p>
@@ -16878,6 +17283,683 @@
                 <a:ea typeface="Calibri" pitchFamily="34" charset="-122"/>
                 <a:cs typeface="Calibri" pitchFamily="34" charset="-120"/>
               </a:rPr>
+              <a:t>HOMEWORK</a:t>
+            </a:r>
+            <a:endParaRPr lang="en-US" sz="1400" dirty="0"/>
+          </a:p>
+        </p:txBody>
+      </p:sp>
+      <p:pic>
+        <p:nvPicPr>
+          <p:cNvPr id="3" name="Image 0" descr="/home/claude/f4/img/minesec_sheet.png">    </p:cNvPr>
+          <p:cNvPicPr>
+            <a:picLocks noChangeAspect="1"/>
+          </p:cNvPicPr>
+          <p:nvPr/>
+        </p:nvPicPr>
+        <p:blipFill>
+          <a:blip r:embed="rId1"/>
+          <a:stretch>
+            <a:fillRect/>
+          </a:stretch>
+        </p:blipFill>
+        <p:spPr>
+          <a:xfrm>
+            <a:off x="0" y="658368"/>
+            <a:ext cx="5120640" cy="5833872"/>
+          </a:xfrm>
+          <a:prstGeom prst="rect">
+            <a:avLst/>
+          </a:prstGeom>
+        </p:spPr>
+      </p:pic>
+      <p:sp>
+        <p:nvSpPr>
+          <p:cNvPr id="4" name="Text 1"/>
+          <p:cNvSpPr/>
+          <p:nvPr/>
+        </p:nvSpPr>
+        <p:spPr>
+          <a:xfrm>
+            <a:off x="5349240" y="1005840"/>
+            <a:ext cx="6522415" cy="731520"/>
+          </a:xfrm>
+          <a:prstGeom prst="rect">
+            <a:avLst/>
+          </a:prstGeom>
+          <a:noFill/>
+          <a:ln/>
+        </p:spPr>
+        <p:txBody>
+          <a:bodyPr wrap="square" lIns="0" tIns="0" rIns="0" bIns="0" rtlCol="0" anchor="ctr">
+            <a:normAutofit/>
+          </a:bodyPr>
+          <a:lstStyle/>
+          <a:p>
+            <a:pPr algn="ctr" indent="0" marL="0">
+              <a:buNone/>
+            </a:pPr>
+            <a:r>
+              <a:rPr lang="en-US" sz="3600" b="1" dirty="0">
+                <a:solidFill>
+                  <a:srgbClr val="990011"/>
+                </a:solidFill>
+                <a:latin typeface="Times New Roman" pitchFamily="34" charset="0"/>
+                <a:ea typeface="Times New Roman" pitchFamily="34" charset="-122"/>
+                <a:cs typeface="Times New Roman" pitchFamily="34" charset="-120"/>
+              </a:rPr>
+              <a:t>Homework</a:t>
+            </a:r>
+            <a:endParaRPr lang="en-US" sz="3600" dirty="0"/>
+          </a:p>
+        </p:txBody>
+      </p:sp>
+      <p:sp>
+        <p:nvSpPr>
+          <p:cNvPr id="5" name="Text 2"/>
+          <p:cNvSpPr/>
+          <p:nvPr/>
+        </p:nvSpPr>
+        <p:spPr>
+          <a:xfrm>
+            <a:off x="5349240" y="1783080"/>
+            <a:ext cx="6522415" cy="4663440"/>
+          </a:xfrm>
+          <a:prstGeom prst="rect">
+            <a:avLst/>
+          </a:prstGeom>
+          <a:noFill/>
+          <a:ln/>
+        </p:spPr>
+        <p:txBody>
+          <a:bodyPr wrap="square" lIns="0" tIns="0" rIns="0" bIns="0" rtlCol="0" anchor="t"/>
+          <a:lstStyle/>
+          <a:p>
+            <a:pPr algn="l" indent="0" marL="0">
+              <a:spcAft>
+                <a:spcPts val="800"/>
+              </a:spcAft>
+              <a:buNone/>
+            </a:pPr>
+            <a:r>
+              <a:rPr lang="en-US" sz="4000" dirty="0">
+                <a:solidFill>
+                  <a:srgbClr val="111111"/>
+                </a:solidFill>
+                <a:latin typeface="Times New Roman" pitchFamily="34" charset="0"/>
+                <a:ea typeface="Times New Roman" pitchFamily="34" charset="-122"/>
+                <a:cs typeface="Times New Roman" pitchFamily="34" charset="-120"/>
+              </a:rPr>
+              <a:t>Draw a sketch map of the Chad–Cameroon pipeline.</a:t>
+            </a:r>
+            <a:endParaRPr lang="en-US" sz="4000" dirty="0"/>
+          </a:p>
+        </p:txBody>
+      </p:sp>
+      <p:sp>
+        <p:nvSpPr>
+          <p:cNvPr id="25" name="Slide Number Placeholder 0"/>
+          <p:cNvSpPr>
+            <a:spLocks noGrp="1"/>
+          </p:cNvSpPr>
+          <p:nvPr>
+            <p:ph type="sldNum" sz="quarter" idx="4294967295"/>
+          </p:nvPr>
+        </p:nvSpPr>
+        <p:spPr>
+          <a:xfrm>
+            <a:off x="27432" y="91440"/>
+            <a:ext cx="585216" cy="475488"/>
+          </a:xfrm>
+          <a:prstGeom prst="rect">
+            <a:avLst/>
+          </a:prstGeom>
+          <a:extLst>
+            <a:ext uri="{C572A759-6A51-4108-AA02-DFA0A04FC94B}">
+              <ma14:wrappingTextBoxFlag xmlns:ma14="http://schemas.microsoft.com/office/mac/drawingml/2011/main" val="0"/>
+            </a:ext>
+          </a:extLst>
+        </p:spPr>
+        <p:txBody>
+          <a:bodyPr/>
+          <a:lstStyle>
+            <a:lvl1pPr>
+              <a:defRPr sz="2000">
+                <a:solidFill>
+                  <a:srgbClr val="FFFFFF"/>
+                </a:solidFill>
+                <a:latin typeface="Calibri"/>
+                <a:ea typeface="Calibri"/>
+                <a:cs typeface="Calibri"/>
+              </a:defRPr>
+            </a:lvl1pPr>
+          </a:lstStyle>
+          <a:p>
+            <a:pPr algn="ctr"/>
+            <a:fld id="{F7021451-1387-4CA6-816F-3879F97B5CBC}" type="slidenum">
+              <a:rPr b="1" lang="en-US"/>
+              <a:t>48</a:t>
+            </a:fld>
+            <a:endParaRPr lang="en-US"/>
+          </a:p>
+        </p:txBody>
+      </p:sp>
+    </p:spTree>
+  </p:cSld>
+  <p:clrMapOvr>
+    <a:masterClrMapping/>
+  </p:clrMapOvr>
+</p:sld>
+</file>
+
+<file path=ppt/slides/slide49.xml><?xml version="1.0" encoding="utf-8"?>
+<p:sld xmlns:a="http://schemas.openxmlformats.org/drawingml/2006/main" xmlns:r="http://schemas.openxmlformats.org/officeDocument/2006/relationships" xmlns:p="http://schemas.openxmlformats.org/presentationml/2006/main">
+  <p:cSld name="Slide 49">
+    <p:spTree>
+      <p:nvGrpSpPr>
+        <p:cNvPr id="1" name=""/>
+        <p:cNvGrpSpPr/>
+        <p:nvPr/>
+      </p:nvGrpSpPr>
+      <p:grpSpPr>
+        <a:xfrm>
+          <a:off x="0" y="0"/>
+          <a:ext cx="0" cy="0"/>
+          <a:chOff x="0" y="0"/>
+          <a:chExt cx="0" cy="0"/>
+        </a:xfrm>
+      </p:grpSpPr>
+      <p:sp>
+        <p:nvSpPr>
+          <p:cNvPr id="2" name="Text 0"/>
+          <p:cNvSpPr/>
+          <p:nvPr/>
+        </p:nvSpPr>
+        <p:spPr>
+          <a:xfrm>
+            <a:off x="457200" y="713232"/>
+            <a:ext cx="11368735" cy="274320"/>
+          </a:xfrm>
+          <a:prstGeom prst="rect">
+            <a:avLst/>
+          </a:prstGeom>
+          <a:noFill/>
+          <a:ln/>
+        </p:spPr>
+        <p:txBody>
+          <a:bodyPr wrap="square" lIns="0" tIns="0" rIns="0" bIns="0" rtlCol="0" anchor="ctr"/>
+          <a:lstStyle/>
+          <a:p>
+            <a:pPr algn="r" indent="0" marL="0">
+              <a:buNone/>
+            </a:pPr>
+            <a:r>
+              <a:rPr lang="en-US" sz="1400" b="1" dirty="0">
+                <a:solidFill>
+                  <a:srgbClr val="1C3F6E"/>
+                </a:solidFill>
+                <a:latin typeface="Calibri" pitchFamily="34" charset="0"/>
+                <a:ea typeface="Calibri" pitchFamily="34" charset="-122"/>
+                <a:cs typeface="Calibri" pitchFamily="34" charset="-120"/>
+              </a:rPr>
+              <a:t>NEXT LESSON</a:t>
+            </a:r>
+            <a:endParaRPr lang="en-US" sz="1400" dirty="0"/>
+          </a:p>
+        </p:txBody>
+      </p:sp>
+      <p:pic>
+        <p:nvPicPr>
+          <p:cNvPr id="3" name="Image 0" descr="/home/claude/f4/img/minesec_sheet.png">    </p:cNvPr>
+          <p:cNvPicPr>
+            <a:picLocks noChangeAspect="1"/>
+          </p:cNvPicPr>
+          <p:nvPr/>
+        </p:nvPicPr>
+        <p:blipFill>
+          <a:blip r:embed="rId1"/>
+          <a:stretch>
+            <a:fillRect/>
+          </a:stretch>
+        </p:blipFill>
+        <p:spPr>
+          <a:xfrm>
+            <a:off x="0" y="658368"/>
+            <a:ext cx="5120640" cy="5833872"/>
+          </a:xfrm>
+          <a:prstGeom prst="rect">
+            <a:avLst/>
+          </a:prstGeom>
+        </p:spPr>
+      </p:pic>
+      <p:sp>
+        <p:nvSpPr>
+          <p:cNvPr id="4" name="Text 1"/>
+          <p:cNvSpPr/>
+          <p:nvPr/>
+        </p:nvSpPr>
+        <p:spPr>
+          <a:xfrm>
+            <a:off x="5349240" y="1005840"/>
+            <a:ext cx="6522415" cy="731520"/>
+          </a:xfrm>
+          <a:prstGeom prst="rect">
+            <a:avLst/>
+          </a:prstGeom>
+          <a:noFill/>
+          <a:ln/>
+        </p:spPr>
+        <p:txBody>
+          <a:bodyPr wrap="square" lIns="0" tIns="0" rIns="0" bIns="0" rtlCol="0" anchor="ctr">
+            <a:normAutofit/>
+          </a:bodyPr>
+          <a:lstStyle/>
+          <a:p>
+            <a:pPr algn="ctr" indent="0" marL="0">
+              <a:buNone/>
+            </a:pPr>
+            <a:r>
+              <a:rPr lang="en-US" sz="3600" b="1" dirty="0">
+                <a:solidFill>
+                  <a:srgbClr val="990011"/>
+                </a:solidFill>
+                <a:latin typeface="Times New Roman" pitchFamily="34" charset="0"/>
+                <a:ea typeface="Times New Roman" pitchFamily="34" charset="-122"/>
+                <a:cs typeface="Times New Roman" pitchFamily="34" charset="-120"/>
+              </a:rPr>
+              <a:t>Next Lesson</a:t>
+            </a:r>
+            <a:endParaRPr lang="en-US" sz="3600" dirty="0"/>
+          </a:p>
+        </p:txBody>
+      </p:sp>
+      <p:sp>
+        <p:nvSpPr>
+          <p:cNvPr id="5" name="Text 2"/>
+          <p:cNvSpPr/>
+          <p:nvPr/>
+        </p:nvSpPr>
+        <p:spPr>
+          <a:xfrm>
+            <a:off x="5349240" y="1783080"/>
+            <a:ext cx="6522415" cy="4663440"/>
+          </a:xfrm>
+          <a:prstGeom prst="rect">
+            <a:avLst/>
+          </a:prstGeom>
+          <a:noFill/>
+          <a:ln/>
+        </p:spPr>
+        <p:txBody>
+          <a:bodyPr wrap="square" lIns="0" tIns="0" rIns="0" bIns="0" rtlCol="0" anchor="ctr"/>
+          <a:lstStyle/>
+          <a:p>
+            <a:pPr algn="ctr" indent="0" marL="0">
+              <a:spcAft>
+                <a:spcPts val="800"/>
+              </a:spcAft>
+              <a:buNone/>
+            </a:pPr>
+            <a:r>
+              <a:rPr lang="en-US" sz="4000" b="1" dirty="0">
+                <a:solidFill>
+                  <a:srgbClr val="111111"/>
+                </a:solidFill>
+                <a:latin typeface="Times New Roman" pitchFamily="34" charset="0"/>
+                <a:ea typeface="Times New Roman" pitchFamily="34" charset="-122"/>
+                <a:cs typeface="Times New Roman" pitchFamily="34" charset="-120"/>
+              </a:rPr>
+              <a:t>Our next lesson will be on:</a:t>
+            </a:r>
+            <a:endParaRPr lang="en-US" sz="4000" dirty="0"/>
+          </a:p>
+          <a:p>
+            <a:pPr algn="ctr" indent="0" marL="0">
+              <a:spcAft>
+                <a:spcPts val="800"/>
+              </a:spcAft>
+              <a:buNone/>
+            </a:pPr>
+            <a:r>
+              <a:rPr lang="en-US" sz="4000" b="1" dirty="0">
+                <a:solidFill>
+                  <a:srgbClr val="990011"/>
+                </a:solidFill>
+                <a:latin typeface="Times New Roman" pitchFamily="34" charset="0"/>
+                <a:ea typeface="Times New Roman" pitchFamily="34" charset="-122"/>
+                <a:cs typeface="Times New Roman" pitchFamily="34" charset="-120"/>
+              </a:rPr>
+              <a:t>Lesson 14: Globalisation</a:t>
+            </a:r>
+            <a:endParaRPr lang="en-US" sz="4000" dirty="0"/>
+          </a:p>
+        </p:txBody>
+      </p:sp>
+      <p:sp>
+        <p:nvSpPr>
+          <p:cNvPr id="25" name="Slide Number Placeholder 0"/>
+          <p:cNvSpPr>
+            <a:spLocks noGrp="1"/>
+          </p:cNvSpPr>
+          <p:nvPr>
+            <p:ph type="sldNum" sz="quarter" idx="4294967295"/>
+          </p:nvPr>
+        </p:nvSpPr>
+        <p:spPr>
+          <a:xfrm>
+            <a:off x="27432" y="91440"/>
+            <a:ext cx="585216" cy="475488"/>
+          </a:xfrm>
+          <a:prstGeom prst="rect">
+            <a:avLst/>
+          </a:prstGeom>
+          <a:extLst>
+            <a:ext uri="{C572A759-6A51-4108-AA02-DFA0A04FC94B}">
+              <ma14:wrappingTextBoxFlag xmlns:ma14="http://schemas.microsoft.com/office/mac/drawingml/2011/main" val="0"/>
+            </a:ext>
+          </a:extLst>
+        </p:spPr>
+        <p:txBody>
+          <a:bodyPr/>
+          <a:lstStyle>
+            <a:lvl1pPr>
+              <a:defRPr sz="2000">
+                <a:solidFill>
+                  <a:srgbClr val="FFFFFF"/>
+                </a:solidFill>
+                <a:latin typeface="Calibri"/>
+                <a:ea typeface="Calibri"/>
+                <a:cs typeface="Calibri"/>
+              </a:defRPr>
+            </a:lvl1pPr>
+          </a:lstStyle>
+          <a:p>
+            <a:pPr algn="ctr"/>
+            <a:fld id="{F7021451-1387-4CA6-816F-3879F97B5CBC}" type="slidenum">
+              <a:rPr b="1" lang="en-US"/>
+              <a:t>49</a:t>
+            </a:fld>
+            <a:endParaRPr lang="en-US"/>
+          </a:p>
+        </p:txBody>
+      </p:sp>
+    </p:spTree>
+  </p:cSld>
+  <p:clrMapOvr>
+    <a:masterClrMapping/>
+  </p:clrMapOvr>
+</p:sld>
+</file>
+
+<file path=ppt/slides/slide5.xml><?xml version="1.0" encoding="utf-8"?>
+<p:sld xmlns:a="http://schemas.openxmlformats.org/drawingml/2006/main" xmlns:r="http://schemas.openxmlformats.org/officeDocument/2006/relationships" xmlns:p="http://schemas.openxmlformats.org/presentationml/2006/main">
+  <p:cSld name="Slide 5">
+    <p:spTree>
+      <p:nvGrpSpPr>
+        <p:cNvPr id="1" name=""/>
+        <p:cNvGrpSpPr/>
+        <p:nvPr/>
+      </p:nvGrpSpPr>
+      <p:grpSpPr>
+        <a:xfrm>
+          <a:off x="0" y="0"/>
+          <a:ext cx="0" cy="0"/>
+          <a:chOff x="0" y="0"/>
+          <a:chExt cx="0" cy="0"/>
+        </a:xfrm>
+      </p:grpSpPr>
+      <p:sp>
+        <p:nvSpPr>
+          <p:cNvPr id="2" name="Text 0"/>
+          <p:cNvSpPr/>
+          <p:nvPr/>
+        </p:nvSpPr>
+        <p:spPr>
+          <a:xfrm>
+            <a:off x="457200" y="713232"/>
+            <a:ext cx="11368735" cy="274320"/>
+          </a:xfrm>
+          <a:prstGeom prst="rect">
+            <a:avLst/>
+          </a:prstGeom>
+          <a:noFill/>
+          <a:ln/>
+        </p:spPr>
+        <p:txBody>
+          <a:bodyPr wrap="square" lIns="0" tIns="0" rIns="0" bIns="0" rtlCol="0" anchor="ctr"/>
+          <a:lstStyle/>
+          <a:p>
+            <a:pPr algn="r" indent="0" marL="0">
+              <a:buNone/>
+            </a:pPr>
+            <a:r>
+              <a:rPr lang="en-US" sz="1400" b="1" dirty="0">
+                <a:solidFill>
+                  <a:srgbClr val="1C3F6E"/>
+                </a:solidFill>
+                <a:latin typeface="Calibri" pitchFamily="34" charset="0"/>
+                <a:ea typeface="Calibri" pitchFamily="34" charset="-122"/>
+                <a:cs typeface="Calibri" pitchFamily="34" charset="-120"/>
+              </a:rPr>
+              <a:t>HOMEWORK CORRECTION</a:t>
+            </a:r>
+            <a:endParaRPr lang="en-US" sz="1400" dirty="0"/>
+          </a:p>
+        </p:txBody>
+      </p:sp>
+      <p:pic>
+        <p:nvPicPr>
+          <p:cNvPr id="3" name="Image 0" descr="/home/claude/f4/img/minesec_sheet.png">    </p:cNvPr>
+          <p:cNvPicPr>
+            <a:picLocks noChangeAspect="1"/>
+          </p:cNvPicPr>
+          <p:nvPr/>
+        </p:nvPicPr>
+        <p:blipFill>
+          <a:blip r:embed="rId1"/>
+          <a:stretch>
+            <a:fillRect/>
+          </a:stretch>
+        </p:blipFill>
+        <p:spPr>
+          <a:xfrm>
+            <a:off x="0" y="658368"/>
+            <a:ext cx="5120640" cy="5833872"/>
+          </a:xfrm>
+          <a:prstGeom prst="rect">
+            <a:avLst/>
+          </a:prstGeom>
+        </p:spPr>
+      </p:pic>
+      <p:sp>
+        <p:nvSpPr>
+          <p:cNvPr id="4" name="Text 1"/>
+          <p:cNvSpPr/>
+          <p:nvPr/>
+        </p:nvSpPr>
+        <p:spPr>
+          <a:xfrm>
+            <a:off x="5349240" y="1005840"/>
+            <a:ext cx="6522415" cy="731520"/>
+          </a:xfrm>
+          <a:prstGeom prst="rect">
+            <a:avLst/>
+          </a:prstGeom>
+          <a:noFill/>
+          <a:ln/>
+        </p:spPr>
+        <p:txBody>
+          <a:bodyPr wrap="square" lIns="0" tIns="0" rIns="0" bIns="0" rtlCol="0" anchor="ctr">
+            <a:normAutofit/>
+          </a:bodyPr>
+          <a:lstStyle/>
+          <a:p>
+            <a:pPr algn="ctr" indent="0" marL="0">
+              <a:buNone/>
+            </a:pPr>
+            <a:r>
+              <a:rPr lang="en-US" sz="3600" b="1" dirty="0">
+                <a:solidFill>
+                  <a:srgbClr val="990011"/>
+                </a:solidFill>
+                <a:latin typeface="Times New Roman" pitchFamily="34" charset="0"/>
+                <a:ea typeface="Times New Roman" pitchFamily="34" charset="-122"/>
+                <a:cs typeface="Times New Roman" pitchFamily="34" charset="-120"/>
+              </a:rPr>
+              <a:t>Correction: Possible Answer</a:t>
+            </a:r>
+            <a:endParaRPr lang="en-US" sz="3600" dirty="0"/>
+          </a:p>
+        </p:txBody>
+      </p:sp>
+      <p:sp>
+        <p:nvSpPr>
+          <p:cNvPr id="5" name="Text 2"/>
+          <p:cNvSpPr/>
+          <p:nvPr/>
+        </p:nvSpPr>
+        <p:spPr>
+          <a:xfrm>
+            <a:off x="5349240" y="1783080"/>
+            <a:ext cx="6522415" cy="4663440"/>
+          </a:xfrm>
+          <a:prstGeom prst="rect">
+            <a:avLst/>
+          </a:prstGeom>
+          <a:noFill/>
+          <a:ln/>
+        </p:spPr>
+        <p:txBody>
+          <a:bodyPr wrap="square" lIns="0" tIns="0" rIns="0" bIns="0" rtlCol="0" anchor="t"/>
+          <a:lstStyle/>
+          <a:p>
+            <a:pPr algn="l" indent="0" marL="0">
+              <a:spcAft>
+                <a:spcPts val="800"/>
+              </a:spcAft>
+              <a:buNone/>
+            </a:pPr>
+            <a:r>
+              <a:rPr lang="en-US" sz="4000" dirty="0">
+                <a:solidFill>
+                  <a:srgbClr val="111111"/>
+                </a:solidFill>
+                <a:latin typeface="Times New Roman" pitchFamily="34" charset="0"/>
+                <a:ea typeface="Times New Roman" pitchFamily="34" charset="-122"/>
+                <a:cs typeface="Times New Roman" pitchFamily="34" charset="-120"/>
+              </a:rPr>
+              <a:t>Motorway: Douala–Yaoundé (heavy traffic, under construction); cableway: Mount Cameroon or the Mandara Mountains for tourism.</a:t>
+            </a:r>
+            <a:endParaRPr lang="en-US" sz="4000" dirty="0"/>
+          </a:p>
+        </p:txBody>
+      </p:sp>
+      <p:sp>
+        <p:nvSpPr>
+          <p:cNvPr id="25" name="Slide Number Placeholder 0"/>
+          <p:cNvSpPr>
+            <a:spLocks noGrp="1"/>
+          </p:cNvSpPr>
+          <p:nvPr>
+            <p:ph type="sldNum" sz="quarter" idx="4294967295"/>
+          </p:nvPr>
+        </p:nvSpPr>
+        <p:spPr>
+          <a:xfrm>
+            <a:off x="27432" y="91440"/>
+            <a:ext cx="585216" cy="475488"/>
+          </a:xfrm>
+          <a:prstGeom prst="rect">
+            <a:avLst/>
+          </a:prstGeom>
+          <a:extLst>
+            <a:ext uri="{C572A759-6A51-4108-AA02-DFA0A04FC94B}">
+              <ma14:wrappingTextBoxFlag xmlns:ma14="http://schemas.microsoft.com/office/mac/drawingml/2011/main" val="0"/>
+            </a:ext>
+          </a:extLst>
+        </p:spPr>
+        <p:txBody>
+          <a:bodyPr/>
+          <a:lstStyle>
+            <a:lvl1pPr>
+              <a:defRPr sz="2000">
+                <a:solidFill>
+                  <a:srgbClr val="FFFFFF"/>
+                </a:solidFill>
+                <a:latin typeface="Calibri"/>
+                <a:ea typeface="Calibri"/>
+                <a:cs typeface="Calibri"/>
+              </a:defRPr>
+            </a:lvl1pPr>
+          </a:lstStyle>
+          <a:p>
+            <a:pPr algn="ctr"/>
+            <a:fld id="{F7021451-1387-4CA6-816F-3879F97B5CBC}" type="slidenum">
+              <a:rPr b="1" lang="en-US"/>
+              <a:t>5</a:t>
+            </a:fld>
+            <a:endParaRPr lang="en-US"/>
+          </a:p>
+        </p:txBody>
+      </p:sp>
+    </p:spTree>
+  </p:cSld>
+  <p:clrMapOvr>
+    <a:masterClrMapping/>
+  </p:clrMapOvr>
+</p:sld>
+</file>
+
+<file path=ppt/slides/slide50.xml><?xml version="1.0" encoding="utf-8"?>
+<p:sld xmlns:a="http://schemas.openxmlformats.org/drawingml/2006/main" xmlns:r="http://schemas.openxmlformats.org/officeDocument/2006/relationships" xmlns:p="http://schemas.openxmlformats.org/presentationml/2006/main">
+  <p:cSld name="Slide 50">
+    <p:spTree>
+      <p:nvGrpSpPr>
+        <p:cNvPr id="1" name=""/>
+        <p:cNvGrpSpPr/>
+        <p:nvPr/>
+      </p:nvGrpSpPr>
+      <p:grpSpPr>
+        <a:xfrm>
+          <a:off x="0" y="0"/>
+          <a:ext cx="0" cy="0"/>
+          <a:chOff x="0" y="0"/>
+          <a:chExt cx="0" cy="0"/>
+        </a:xfrm>
+      </p:grpSpPr>
+      <p:sp>
+        <p:nvSpPr>
+          <p:cNvPr id="2" name="Text 0"/>
+          <p:cNvSpPr/>
+          <p:nvPr/>
+        </p:nvSpPr>
+        <p:spPr>
+          <a:xfrm>
+            <a:off x="457200" y="713232"/>
+            <a:ext cx="11368735" cy="274320"/>
+          </a:xfrm>
+          <a:prstGeom prst="rect">
+            <a:avLst/>
+          </a:prstGeom>
+          <a:noFill/>
+          <a:ln/>
+        </p:spPr>
+        <p:txBody>
+          <a:bodyPr wrap="square" lIns="0" tIns="0" rIns="0" bIns="0" rtlCol="0" anchor="ctr"/>
+          <a:lstStyle/>
+          <a:p>
+            <a:pPr algn="r" indent="0" marL="0">
+              <a:buNone/>
+            </a:pPr>
+            <a:r>
+              <a:rPr lang="en-US" sz="1400" b="1" dirty="0">
+                <a:solidFill>
+                  <a:srgbClr val="1C3F6E"/>
+                </a:solidFill>
+                <a:latin typeface="Calibri" pitchFamily="34" charset="0"/>
+                <a:ea typeface="Calibri" pitchFamily="34" charset="-122"/>
+                <a:cs typeface="Calibri" pitchFamily="34" charset="-120"/>
+              </a:rPr>
               <a:t>BILINGUAL GAME</a:t>
             </a:r>
             <a:endParaRPr lang="en-US" sz="1400" dirty="0"/>
@@ -16925,7 +18007,7 @@
       </p:sp>
       <p:graphicFrame>
         <p:nvGraphicFramePr>
-          <p:cNvPr id="49" name="Table 0"/>
+          <p:cNvPr id="51" name="Table 0"/>
           <p:cNvGraphicFramePr>
             <a:graphicFrameLocks noGrp="1"/>
           </p:cNvGraphicFramePr>
@@ -17961,7 +19043,7 @@
             <a:pPr algn="ctr"/>
             <a:fld id="{F7021451-1387-4CA6-816F-3879F97B5CBC}" type="slidenum">
               <a:rPr b="1" lang="en-US"/>
-              <a:t>48</a:t>
+              <a:t>50</a:t>
             </a:fld>
             <a:endParaRPr lang="en-US"/>
           </a:p>
@@ -17975,9 +19057,9 @@
 </p:sld>
 </file>
 
-<file path=ppt/slides/slide49.xml><?xml version="1.0" encoding="utf-8"?>
+<file path=ppt/slides/slide51.xml><?xml version="1.0" encoding="utf-8"?>
 <p:sld xmlns:a="http://schemas.openxmlformats.org/drawingml/2006/main" xmlns:r="http://schemas.openxmlformats.org/officeDocument/2006/relationships" xmlns:p="http://schemas.openxmlformats.org/presentationml/2006/main">
-  <p:cSld name="Slide 49">
+  <p:cSld name="Slide 51">
     <p:spTree>
       <p:nvGrpSpPr>
         <p:cNvPr id="1" name=""/>
@@ -18072,7 +19154,7 @@
       </p:sp>
       <p:graphicFrame>
         <p:nvGraphicFramePr>
-          <p:cNvPr id="50" name="Table 0"/>
+          <p:cNvPr id="52" name="Table 0"/>
           <p:cNvGraphicFramePr>
             <a:graphicFrameLocks noGrp="1"/>
           </p:cNvGraphicFramePr>
@@ -18694,7 +19776,7 @@
             <a:pPr algn="ctr"/>
             <a:fld id="{F7021451-1387-4CA6-816F-3879F97B5CBC}" type="slidenum">
               <a:rPr b="1" lang="en-US"/>
-              <a:t>49</a:t>
+              <a:t>51</a:t>
             </a:fld>
             <a:endParaRPr lang="en-US"/>
           </a:p>
@@ -18708,9 +19790,9 @@
 </p:sld>
 </file>
 
-<file path=ppt/slides/slide5.xml><?xml version="1.0" encoding="utf-8"?>
+<file path=ppt/slides/slide52.xml><?xml version="1.0" encoding="utf-8"?>
 <p:sld xmlns:a="http://schemas.openxmlformats.org/drawingml/2006/main" xmlns:r="http://schemas.openxmlformats.org/officeDocument/2006/relationships" xmlns:p="http://schemas.openxmlformats.org/presentationml/2006/main">
-  <p:cSld name="Slide 5">
+  <p:cSld name="Slide 52">
     <p:spTree>
       <p:nvGrpSpPr>
         <p:cNvPr id="1" name=""/>
@@ -18758,225 +19840,6 @@
                 <a:ea typeface="Calibri" pitchFamily="34" charset="-122"/>
                 <a:cs typeface="Calibri" pitchFamily="34" charset="-120"/>
               </a:rPr>
-              <a:t>HOMEWORK CORRECTION</a:t>
-            </a:r>
-            <a:endParaRPr lang="en-US" sz="1400" dirty="0"/>
-          </a:p>
-        </p:txBody>
-      </p:sp>
-      <p:pic>
-        <p:nvPicPr>
-          <p:cNvPr id="3" name="Image 0" descr="/home/claude/f4/img/minesec_sheet.png">    </p:cNvPr>
-          <p:cNvPicPr>
-            <a:picLocks noChangeAspect="1"/>
-          </p:cNvPicPr>
-          <p:nvPr/>
-        </p:nvPicPr>
-        <p:blipFill>
-          <a:blip r:embed="rId1"/>
-          <a:stretch>
-            <a:fillRect/>
-          </a:stretch>
-        </p:blipFill>
-        <p:spPr>
-          <a:xfrm>
-            <a:off x="0" y="658368"/>
-            <a:ext cx="5120640" cy="5833872"/>
-          </a:xfrm>
-          <a:prstGeom prst="rect">
-            <a:avLst/>
-          </a:prstGeom>
-        </p:spPr>
-      </p:pic>
-      <p:sp>
-        <p:nvSpPr>
-          <p:cNvPr id="4" name="Text 1"/>
-          <p:cNvSpPr/>
-          <p:nvPr/>
-        </p:nvSpPr>
-        <p:spPr>
-          <a:xfrm>
-            <a:off x="5349240" y="1005840"/>
-            <a:ext cx="6522415" cy="731520"/>
-          </a:xfrm>
-          <a:prstGeom prst="rect">
-            <a:avLst/>
-          </a:prstGeom>
-          <a:noFill/>
-          <a:ln/>
-        </p:spPr>
-        <p:txBody>
-          <a:bodyPr wrap="square" lIns="0" tIns="0" rIns="0" bIns="0" rtlCol="0" anchor="ctr">
-            <a:normAutofit/>
-          </a:bodyPr>
-          <a:lstStyle/>
-          <a:p>
-            <a:pPr algn="ctr" indent="0" marL="0">
-              <a:buNone/>
-            </a:pPr>
-            <a:r>
-              <a:rPr lang="en-US" sz="3600" b="1" dirty="0">
-                <a:solidFill>
-                  <a:srgbClr val="990011"/>
-                </a:solidFill>
-                <a:latin typeface="Times New Roman" pitchFamily="34" charset="0"/>
-                <a:ea typeface="Times New Roman" pitchFamily="34" charset="-122"/>
-                <a:cs typeface="Times New Roman" pitchFamily="34" charset="-120"/>
-              </a:rPr>
-              <a:t>Correction: Possible Answer</a:t>
-            </a:r>
-            <a:endParaRPr lang="en-US" sz="3600" dirty="0"/>
-          </a:p>
-        </p:txBody>
-      </p:sp>
-      <p:sp>
-        <p:nvSpPr>
-          <p:cNvPr id="5" name="Text 2"/>
-          <p:cNvSpPr/>
-          <p:nvPr/>
-        </p:nvSpPr>
-        <p:spPr>
-          <a:xfrm>
-            <a:off x="5349240" y="1783080"/>
-            <a:ext cx="6522415" cy="4663440"/>
-          </a:xfrm>
-          <a:prstGeom prst="rect">
-            <a:avLst/>
-          </a:prstGeom>
-          <a:noFill/>
-          <a:ln/>
-        </p:spPr>
-        <p:txBody>
-          <a:bodyPr wrap="square" lIns="0" tIns="0" rIns="0" bIns="0" rtlCol="0" anchor="t"/>
-          <a:lstStyle/>
-          <a:p>
-            <a:pPr algn="l" indent="0" marL="0">
-              <a:spcAft>
-                <a:spcPts val="800"/>
-              </a:spcAft>
-              <a:buNone/>
-            </a:pPr>
-            <a:r>
-              <a:rPr lang="en-US" sz="4000" dirty="0">
-                <a:solidFill>
-                  <a:srgbClr val="111111"/>
-                </a:solidFill>
-                <a:latin typeface="Times New Roman" pitchFamily="34" charset="0"/>
-                <a:ea typeface="Times New Roman" pitchFamily="34" charset="-122"/>
-                <a:cs typeface="Times New Roman" pitchFamily="34" charset="-120"/>
-              </a:rPr>
-              <a:t>Motorway: Douala–Yaoundé (heavy traffic, under construction); cableway: Mount Cameroon or the Mandara Mountains for tourism.</a:t>
-            </a:r>
-            <a:endParaRPr lang="en-US" sz="4000" dirty="0"/>
-          </a:p>
-        </p:txBody>
-      </p:sp>
-      <p:sp>
-        <p:nvSpPr>
-          <p:cNvPr id="25" name="Slide Number Placeholder 0"/>
-          <p:cNvSpPr>
-            <a:spLocks noGrp="1"/>
-          </p:cNvSpPr>
-          <p:nvPr>
-            <p:ph type="sldNum" sz="quarter" idx="4294967295"/>
-          </p:nvPr>
-        </p:nvSpPr>
-        <p:spPr>
-          <a:xfrm>
-            <a:off x="27432" y="91440"/>
-            <a:ext cx="585216" cy="475488"/>
-          </a:xfrm>
-          <a:prstGeom prst="rect">
-            <a:avLst/>
-          </a:prstGeom>
-          <a:extLst>
-            <a:ext uri="{C572A759-6A51-4108-AA02-DFA0A04FC94B}">
-              <ma14:wrappingTextBoxFlag xmlns:ma14="http://schemas.microsoft.com/office/mac/drawingml/2011/main" val="0"/>
-            </a:ext>
-          </a:extLst>
-        </p:spPr>
-        <p:txBody>
-          <a:bodyPr/>
-          <a:lstStyle>
-            <a:lvl1pPr>
-              <a:defRPr sz="2000">
-                <a:solidFill>
-                  <a:srgbClr val="FFFFFF"/>
-                </a:solidFill>
-                <a:latin typeface="Calibri"/>
-                <a:ea typeface="Calibri"/>
-                <a:cs typeface="Calibri"/>
-              </a:defRPr>
-            </a:lvl1pPr>
-          </a:lstStyle>
-          <a:p>
-            <a:pPr algn="ctr"/>
-            <a:fld id="{F7021451-1387-4CA6-816F-3879F97B5CBC}" type="slidenum">
-              <a:rPr b="1" lang="en-US"/>
-              <a:t>5</a:t>
-            </a:fld>
-            <a:endParaRPr lang="en-US"/>
-          </a:p>
-        </p:txBody>
-      </p:sp>
-    </p:spTree>
-  </p:cSld>
-  <p:clrMapOvr>
-    <a:masterClrMapping/>
-  </p:clrMapOvr>
-</p:sld>
-</file>
-
-<file path=ppt/slides/slide50.xml><?xml version="1.0" encoding="utf-8"?>
-<p:sld xmlns:a="http://schemas.openxmlformats.org/drawingml/2006/main" xmlns:r="http://schemas.openxmlformats.org/officeDocument/2006/relationships" xmlns:p="http://schemas.openxmlformats.org/presentationml/2006/main">
-  <p:cSld name="Slide 50">
-    <p:spTree>
-      <p:nvGrpSpPr>
-        <p:cNvPr id="1" name=""/>
-        <p:cNvGrpSpPr/>
-        <p:nvPr/>
-      </p:nvGrpSpPr>
-      <p:grpSpPr>
-        <a:xfrm>
-          <a:off x="0" y="0"/>
-          <a:ext cx="0" cy="0"/>
-          <a:chOff x="0" y="0"/>
-          <a:chExt cx="0" cy="0"/>
-        </a:xfrm>
-      </p:grpSpPr>
-      <p:sp>
-        <p:nvSpPr>
-          <p:cNvPr id="2" name="Text 0"/>
-          <p:cNvSpPr/>
-          <p:nvPr/>
-        </p:nvSpPr>
-        <p:spPr>
-          <a:xfrm>
-            <a:off x="457200" y="713232"/>
-            <a:ext cx="11368735" cy="274320"/>
-          </a:xfrm>
-          <a:prstGeom prst="rect">
-            <a:avLst/>
-          </a:prstGeom>
-          <a:noFill/>
-          <a:ln/>
-        </p:spPr>
-        <p:txBody>
-          <a:bodyPr wrap="square" lIns="0" tIns="0" rIns="0" bIns="0" rtlCol="0" anchor="ctr"/>
-          <a:lstStyle/>
-          <a:p>
-            <a:pPr algn="r" indent="0" marL="0">
-              <a:buNone/>
-            </a:pPr>
-            <a:r>
-              <a:rPr lang="en-US" sz="1400" b="1" dirty="0">
-                <a:solidFill>
-                  <a:srgbClr val="1C3F6E"/>
-                </a:solidFill>
-                <a:latin typeface="Calibri" pitchFamily="34" charset="0"/>
-                <a:ea typeface="Calibri" pitchFamily="34" charset="-122"/>
-                <a:cs typeface="Calibri" pitchFamily="34" charset="-120"/>
-              </a:rPr>
               <a:t>LOGBOOK</a:t>
             </a:r>
             <a:endParaRPr lang="en-US" sz="1400" dirty="0"/>
@@ -19024,7 +19887,7 @@
       </p:sp>
       <p:graphicFrame>
         <p:nvGraphicFramePr>
-          <p:cNvPr id="51" name="Table 0"/>
+          <p:cNvPr id="53" name="Table 0"/>
           <p:cNvGraphicFramePr>
             <a:graphicFrameLocks noGrp="1"/>
           </p:cNvGraphicFramePr>
@@ -19134,7 +19997,7 @@
                           <a:ea typeface="Calibri" pitchFamily="34" charset="-122"/>
                           <a:cs typeface="Calibri" pitchFamily="34" charset="-120"/>
                         </a:rPr>
-                        <a:t>DEFINITIONS; Advantages and Disadvantages; Impact on the Economy and the Environment.</a:t>
+                        <a:t>DEFINITIONS; Advantages; Disadvantages and Risks; Impact on the Economy and the Environment.</a:t>
                       </a:r>
                       <a:endParaRPr lang="en-US" sz="1600" dirty="0">
                         <a:latin typeface="Calibri" charset="0"/>
@@ -19784,7 +20647,7 @@
             <a:pPr algn="ctr"/>
             <a:fld id="{F7021451-1387-4CA6-816F-3879F97B5CBC}" type="slidenum">
               <a:rPr b="1" lang="en-US"/>
-              <a:t>50</a:t>
+              <a:t>52</a:t>
             </a:fld>
             <a:endParaRPr lang="en-US"/>
           </a:p>
@@ -19798,9 +20661,9 @@
 </p:sld>
 </file>
 
-<file path=ppt/slides/slide51.xml><?xml version="1.0" encoding="utf-8"?>
+<file path=ppt/slides/slide53.xml><?xml version="1.0" encoding="utf-8"?>
 <p:sld xmlns:a="http://schemas.openxmlformats.org/drawingml/2006/main" xmlns:r="http://schemas.openxmlformats.org/officeDocument/2006/relationships" xmlns:p="http://schemas.openxmlformats.org/presentationml/2006/main">
-  <p:cSld name="Slide 51">
+  <p:cSld name="Slide 53">
     <p:spTree>
       <p:nvGrpSpPr>
         <p:cNvPr id="1" name=""/>
@@ -20109,7 +20972,7 @@
             <a:pPr algn="ctr"/>
             <a:fld id="{F7021451-1387-4CA6-816F-3879F97B5CBC}" type="slidenum">
               <a:rPr b="1" lang="en-US"/>
-              <a:t>51</a:t>
+              <a:t>53</a:t>
             </a:fld>
             <a:endParaRPr lang="en-US"/>
           </a:p>
@@ -20123,9 +20986,9 @@
 </p:sld>
 </file>
 
-<file path=ppt/slides/slide52.xml><?xml version="1.0" encoding="utf-8"?>
+<file path=ppt/slides/slide54.xml><?xml version="1.0" encoding="utf-8"?>
 <p:sld xmlns:a="http://schemas.openxmlformats.org/drawingml/2006/main" xmlns:r="http://schemas.openxmlformats.org/officeDocument/2006/relationships" xmlns:p="http://schemas.openxmlformats.org/presentationml/2006/main">
-  <p:cSld name="Slide 52">
+  <p:cSld name="Slide 54">
     <p:spTree>
       <p:nvGrpSpPr>
         <p:cNvPr id="1" name=""/>
@@ -20413,7 +21276,7 @@
             <a:pPr algn="ctr"/>
             <a:fld id="{F7021451-1387-4CA6-816F-3879F97B5CBC}" type="slidenum">
               <a:rPr b="1" lang="en-US"/>
-              <a:t>52</a:t>
+              <a:t>54</a:t>
             </a:fld>
             <a:endParaRPr lang="en-US"/>
           </a:p>
